--- a/content/busi1763/files/Unilever_MA_CN.pptx
+++ b/content/busi1763/files/Unilever_MA_CN.pptx
@@ -7,9 +7,11 @@
   <p:sldIdLst>
     <p:sldId id="256" r:id="rId2"/>
     <p:sldId id="257" r:id="rId3"/>
+    <p:sldId id="258" r:id="rId4"/>
+    <p:sldId id="259" r:id="rId5"/>
   </p:sldIdLst>
   <p:notesMasterIdLst>
-    <p:notesMasterId r:id="rId4"/>
+    <p:notesMasterId r:id="rId6"/>
   </p:notesMasterIdLst>
   <p:sldSz cx="9144000" cy="5143500"/>
   <p:notesSz cx="5143500" cy="9144000"/>
@@ -108,10 +110,12 @@
   <p:extLst>
     <p:ext uri="{521415D9-36F7-43E2-AB2F-B90AF26B5E84}">
       <p14:sectionLst xmlns:p14="http://schemas.microsoft.com/office/powerpoint/2010/main">
-        <p14:section name="M&amp;A" id="{ea081a5e-a997-2ef7-d8f4-9196f73f8247}">
+        <p14:section name="M&amp;A" id="{97fbdfca-ad98-7b43-dfec-2b91e69d2cc3}">
           <p14:sldIdLst>
             <p14:sldId id="256"/>
             <p14:sldId id="257"/>
+            <p14:sldId id="258"/>
+            <p14:sldId id="259"/>
           </p14:sldIdLst>
         </p14:section>
       </p14:sectionLst>
@@ -518,7 +522,7 @@
           <a:p>
             <a:r>
               <a:rPr lang="en-US" dirty="0"/>
-              <a:t>（中文版备注）并购 = 收购或合并；Unilever 本身是 1929 年合并成立的。先“买”：Bestfoods 增加和超市谈判的筹码；Ben &amp; Jerry's 独立运营；Dollar Shave Club 学网上直销，但没有协同。转折：2017 年差点被 Kraft Heinz 收购，2022 年买 GSK 被股东否决。2023 年起开始“卖”：DSC、冰淇淋、食品。</a:t>
+              <a:t>（中文版备注）并购 = 收购或合并。六种类型、四种整合方式，目标是协同效应，但 70–90% 失败，主要败在整合。跨国并购也是 FDI 的一种。</a:t>
             </a:r>
             <a:endParaRPr lang="en-US" dirty="0"/>
           </a:p>
@@ -606,7 +610,7 @@
           <a:p>
             <a:r>
               <a:rPr lang="en-US" dirty="0"/>
-              <a:t>为什么卖食品：增长慢；分拆释放价值、避免综合企业折价；现金去买美妆品牌。用理论看：横向并购；协同约每年 3 亿美元；风险是人员整合、监管、2027 年才完成。结论：总体成功，但没有协同的收购失败了。跨国并购也是 FDI 的一种方式。</a:t>
+              <a:t>（中文版备注）并购 = 收购或合并；Unilever 本身是 1929 年合并成立的。先“买”：Bestfoods 增加和超市谈判的筹码；Ben &amp; Jerry's 独立运营；Dollar Shave Club 学网上直销，但没有协同。转折：2017 年差点被 Kraft Heinz 收购，2022 年买 GSK 被股东否决。2023 年起开始“卖”：DSC、冰淇淋、食品。</a:t>
             </a:r>
             <a:endParaRPr lang="en-US" dirty="0"/>
           </a:p>
@@ -630,6 +634,182 @@
             <a:fld id="{F7021451-1387-4CA6-816F-3879F97B5CBC}" type="slidenum">
               <a:rPr lang="en-US"/>
               <a:t>2</a:t>
+            </a:fld>
+            <a:endParaRPr lang="en-US"/>
+          </a:p>
+        </p:txBody>
+      </p:sp>
+    </p:spTree>
+    <p:extLst>
+      <p:ext uri="{BB962C8B-B14F-4D97-AF65-F5344CB8AC3E}">
+        <p14:creationId xmlns:p14="http://schemas.microsoft.com/office/powerpoint/2010/main" val="1024086991"/>
+      </p:ext>
+    </p:extLst>
+  </p:cSld>
+  <p:clrMapOvr>
+    <a:masterClrMapping/>
+  </p:clrMapOvr>
+</p:notes>
+</file>
+
+<file path=ppt/notesSlides/notesSlide3.xml><?xml version="1.0" encoding="utf-8"?>
+<p:notes xmlns:a="http://schemas.openxmlformats.org/drawingml/2006/main" xmlns:r="http://schemas.openxmlformats.org/officeDocument/2006/relationships" xmlns:p="http://schemas.openxmlformats.org/presentationml/2006/main">
+  <p:cSld>
+    <p:spTree>
+      <p:nvGrpSpPr>
+        <p:cNvPr id="1" name=""/>
+        <p:cNvGrpSpPr/>
+        <p:nvPr/>
+      </p:nvGrpSpPr>
+      <p:grpSpPr>
+        <a:xfrm>
+          <a:off x="0" y="0"/>
+          <a:ext cx="0" cy="0"/>
+          <a:chOff x="0" y="0"/>
+          <a:chExt cx="0" cy="0"/>
+        </a:xfrm>
+      </p:grpSpPr>
+      <p:sp>
+        <p:nvSpPr>
+          <p:cNvPr id="2" name="Slide Image Placeholder 1"/>
+          <p:cNvSpPr>
+            <a:spLocks noGrp="1" noRot="1" noChangeAspect="1"/>
+          </p:cNvSpPr>
+          <p:nvPr>
+            <p:ph type="sldImg"/>
+          </p:nvPr>
+        </p:nvSpPr>
+        <p:spPr/>
+      </p:sp>
+      <p:sp>
+        <p:nvSpPr>
+          <p:cNvPr id="3" name="Notes Placeholder 2"/>
+          <p:cNvSpPr>
+            <a:spLocks noGrp="1"/>
+          </p:cNvSpPr>
+          <p:nvPr>
+            <p:ph type="body" idx="1"/>
+          </p:nvPr>
+        </p:nvSpPr>
+        <p:spPr/>
+        <p:txBody>
+          <a:bodyPr/>
+          <a:lstStyle/>
+          <a:p>
+            <a:r>
+              <a:rPr lang="en-US" dirty="0"/>
+              <a:t>为什么卖食品：增长慢；分拆释放价值、避免综合企业折价；现金去买美妆品牌。用理论看：横向并购；协同约每年 3 亿美元；风险是人员整合、监管、2027 年才完成。结论：总体成功，但没有协同的收购失败了。跨国并购也是 FDI 的一种方式。</a:t>
+            </a:r>
+            <a:endParaRPr lang="en-US" dirty="0"/>
+          </a:p>
+        </p:txBody>
+      </p:sp>
+      <p:sp>
+        <p:nvSpPr>
+          <p:cNvPr id="4" name="Slide Number Placeholder 3"/>
+          <p:cNvSpPr>
+            <a:spLocks noGrp="1"/>
+          </p:cNvSpPr>
+          <p:nvPr>
+            <p:ph type="sldNum" sz="quarter" idx="10"/>
+          </p:nvPr>
+        </p:nvSpPr>
+        <p:spPr/>
+        <p:txBody>
+          <a:bodyPr/>
+          <a:lstStyle/>
+          <a:p>
+            <a:fld id="{F7021451-1387-4CA6-816F-3879F97B5CBC}" type="slidenum">
+              <a:rPr lang="en-US"/>
+              <a:t>3</a:t>
+            </a:fld>
+            <a:endParaRPr lang="en-US"/>
+          </a:p>
+        </p:txBody>
+      </p:sp>
+    </p:spTree>
+    <p:extLst>
+      <p:ext uri="{BB962C8B-B14F-4D97-AF65-F5344CB8AC3E}">
+        <p14:creationId xmlns:p14="http://schemas.microsoft.com/office/powerpoint/2010/main" val="1024086991"/>
+      </p:ext>
+    </p:extLst>
+  </p:cSld>
+  <p:clrMapOvr>
+    <a:masterClrMapping/>
+  </p:clrMapOvr>
+</p:notes>
+</file>
+
+<file path=ppt/notesSlides/notesSlide4.xml><?xml version="1.0" encoding="utf-8"?>
+<p:notes xmlns:a="http://schemas.openxmlformats.org/drawingml/2006/main" xmlns:r="http://schemas.openxmlformats.org/officeDocument/2006/relationships" xmlns:p="http://schemas.openxmlformats.org/presentationml/2006/main">
+  <p:cSld>
+    <p:spTree>
+      <p:nvGrpSpPr>
+        <p:cNvPr id="1" name=""/>
+        <p:cNvGrpSpPr/>
+        <p:nvPr/>
+      </p:nvGrpSpPr>
+      <p:grpSpPr>
+        <a:xfrm>
+          <a:off x="0" y="0"/>
+          <a:ext cx="0" cy="0"/>
+          <a:chOff x="0" y="0"/>
+          <a:chExt cx="0" cy="0"/>
+        </a:xfrm>
+      </p:grpSpPr>
+      <p:sp>
+        <p:nvSpPr>
+          <p:cNvPr id="2" name="Slide Image Placeholder 1"/>
+          <p:cNvSpPr>
+            <a:spLocks noGrp="1" noRot="1" noChangeAspect="1"/>
+          </p:cNvSpPr>
+          <p:nvPr>
+            <p:ph type="sldImg"/>
+          </p:nvPr>
+        </p:nvSpPr>
+        <p:spPr/>
+      </p:sp>
+      <p:sp>
+        <p:nvSpPr>
+          <p:cNvPr id="3" name="Notes Placeholder 2"/>
+          <p:cNvSpPr>
+            <a:spLocks noGrp="1"/>
+          </p:cNvSpPr>
+          <p:nvPr>
+            <p:ph type="body" idx="1"/>
+          </p:nvPr>
+        </p:nvSpPr>
+        <p:spPr/>
+        <p:txBody>
+          <a:bodyPr/>
+          <a:lstStyle/>
+          <a:p>
+            <a:r>
+              <a:rPr lang="en-US" dirty="0"/>
+              <a:t>References for the M&amp;A section, Harvard style. Merge into the group reference slide.</a:t>
+            </a:r>
+            <a:endParaRPr lang="en-US" dirty="0"/>
+          </a:p>
+        </p:txBody>
+      </p:sp>
+      <p:sp>
+        <p:nvSpPr>
+          <p:cNvPr id="4" name="Slide Number Placeholder 3"/>
+          <p:cNvSpPr>
+            <a:spLocks noGrp="1"/>
+          </p:cNvSpPr>
+          <p:nvPr>
+            <p:ph type="sldNum" sz="quarter" idx="10"/>
+          </p:nvPr>
+        </p:nvSpPr>
+        <p:spPr/>
+        <p:txBody>
+          <a:bodyPr/>
+          <a:lstStyle/>
+          <a:p>
+            <a:fld id="{F7021451-1387-4CA6-816F-3879F97B5CBC}" type="slidenum">
+              <a:rPr lang="en-US"/>
+              <a:t>4</a:t>
             </a:fld>
             <a:endParaRPr lang="en-US"/>
           </a:p>
@@ -1076,7 +1256,7 @@
                   <a:schemeClr val="tx2"/>
                 </a:solidFill>
               </a:rPr>
-              <a:t>Unilever 的并购：从“买”到“卖”</a:t>
+              <a:t>什么是并购（M&amp;A）？</a:t>
             </a:r>
             <a:endParaRPr lang="en-US" sz="2800" dirty="0"/>
           </a:p>
@@ -1112,7 +1292,7 @@
                   <a:schemeClr val="tx1"/>
                 </a:solidFill>
               </a:rPr>
-              <a:t>前二十年靠收购做大，近几年转向聚焦核心</a:t>
+              <a:t>第 3 讲的核心概念，后面用来分析 Unilever</a:t>
             </a:r>
             <a:endParaRPr lang="en-US" sz="1300" dirty="0"/>
           </a:p>
@@ -1120,18 +1300,18 @@
       </p:sp>
       <p:sp>
         <p:nvSpPr>
-          <p:cNvPr id="4" name="born"/>
+          <p:cNvPr id="4" name="def0"/>
           <p:cNvSpPr/>
           <p:nvPr/>
         </p:nvSpPr>
         <p:spPr>
           <a:xfrm>
-            <a:off x="457200" y="1188720"/>
-            <a:ext cx="8229600" cy="347472"/>
+            <a:off x="457200" y="1234440"/>
+            <a:ext cx="2468880" cy="822960"/>
           </a:xfrm>
           <a:prstGeom prst="roundRect">
             <a:avLst>
-              <a:gd name="adj" fmla="val 21053"/>
+              <a:gd name="adj" fmla="val 11111"/>
             </a:avLst>
           </a:prstGeom>
           <a:solidFill>
@@ -1148,8 +1328,8 @@
         </p:nvSpPr>
         <p:spPr>
           <a:xfrm>
-            <a:off x="594360" y="1188720"/>
-            <a:ext cx="7955280" cy="347472"/>
+            <a:off x="594360" y="1234440"/>
+            <a:ext cx="2240280" cy="822960"/>
           </a:xfrm>
           <a:prstGeom prst="rect">
             <a:avLst/>
@@ -1165,35 +1345,49 @@
               <a:buNone/>
             </a:pPr>
             <a:r>
-              <a:rPr lang="en-US" sz="1200" b="1" dirty="0">
+              <a:rPr lang="en-US" sz="1500" b="1" dirty="0">
+                <a:solidFill>
+                  <a:schemeClr val="tx2"/>
+                </a:solidFill>
+              </a:rPr>
+              <a:t>收购</a:t>
+            </a:r>
+            <a:endParaRPr lang="en-US" sz="1500" dirty="0"/>
+          </a:p>
+          <a:p>
+            <a:pPr indent="0" marL="0">
+              <a:buNone/>
+            </a:pPr>
+            <a:r>
+              <a:rPr lang="en-US" sz="1200" dirty="0">
                 <a:solidFill>
                   <a:schemeClr val="tx1"/>
                 </a:solidFill>
               </a:rPr>
-              <a:t>1929 · 本身就是一次合并：英国 Lever Brothers + 荷兰 Margarine Unie</a:t>
-            </a:r>
-            <a:endParaRPr lang="en-US" sz="1200" dirty="0"/>
-          </a:p>
-        </p:txBody>
-      </p:sp>
-      <p:sp>
-        <p:nvSpPr>
-          <p:cNvPr id="6" name="phase0"/>
+              <a:t>一家公司买下另一家</a:t>
+            </a:r>
+            <a:endParaRPr lang="en-US" sz="1500" dirty="0"/>
+          </a:p>
+        </p:txBody>
+      </p:sp>
+      <p:sp>
+        <p:nvSpPr>
+          <p:cNvPr id="6" name="def1"/>
           <p:cNvSpPr/>
           <p:nvPr/>
         </p:nvSpPr>
         <p:spPr>
           <a:xfrm>
-            <a:off x="457200" y="1691640"/>
-            <a:ext cx="2606040" cy="566928"/>
+            <a:off x="457200" y="2194560"/>
+            <a:ext cx="2468880" cy="822960"/>
           </a:xfrm>
           <a:prstGeom prst="roundRect">
             <a:avLst>
-              <a:gd name="adj" fmla="val 12903"/>
+              <a:gd name="adj" fmla="val 11111"/>
             </a:avLst>
           </a:prstGeom>
           <a:solidFill>
-            <a:schemeClr val="accent1"/>
+            <a:schemeClr val="bg2"/>
           </a:solidFill>
           <a:ln/>
         </p:spPr>
@@ -1206,8 +1400,8 @@
         </p:nvSpPr>
         <p:spPr>
           <a:xfrm>
-            <a:off x="566928" y="1691640"/>
-            <a:ext cx="2386584" cy="566928"/>
+            <a:off x="594360" y="2194560"/>
+            <a:ext cx="2240280" cy="822960"/>
           </a:xfrm>
           <a:prstGeom prst="rect">
             <a:avLst/>
@@ -1225,10 +1419,10 @@
             <a:r>
               <a:rPr lang="en-US" sz="1500" b="1" dirty="0">
                 <a:solidFill>
-                  <a:srgbClr val="FFFFFF"/>
-                </a:solidFill>
-              </a:rPr>
-              <a:t>买</a:t>
+                  <a:schemeClr val="tx2"/>
+                </a:solidFill>
+              </a:rPr>
+              <a:t>合并</a:t>
             </a:r>
             <a:endParaRPr lang="en-US" sz="1500" dirty="0"/>
           </a:p>
@@ -1237,12 +1431,12 @@
               <a:buNone/>
             </a:pPr>
             <a:r>
-              <a:rPr lang="en-US" sz="1050" dirty="0">
-                <a:solidFill>
-                  <a:srgbClr val="FFFFFF"/>
-                </a:solidFill>
-              </a:rPr>
-              <a:t>做大规模、进入新市场</a:t>
+              <a:rPr lang="en-US" sz="1200" dirty="0">
+                <a:solidFill>
+                  <a:schemeClr val="tx1"/>
+                </a:solidFill>
+              </a:rPr>
+              <a:t>规模相近的两家合成一家</a:t>
             </a:r>
             <a:endParaRPr lang="en-US" sz="1500" dirty="0"/>
           </a:p>
@@ -1250,354 +1444,77 @@
       </p:sp>
       <p:sp>
         <p:nvSpPr>
-          <p:cNvPr id="8" name="yr00"/>
+          <p:cNvPr id="8" name="Text 6"/>
+          <p:cNvSpPr txBox="1"/>
+          <p:nvPr/>
+        </p:nvSpPr>
+        <p:spPr>
+          <a:xfrm>
+            <a:off x="3154680" y="1234440"/>
+            <a:ext cx="2743200" cy="274320"/>
+          </a:xfrm>
+          <a:prstGeom prst="rect">
+            <a:avLst/>
+          </a:prstGeom>
+          <a:noFill/>
+          <a:ln/>
+        </p:spPr>
+        <p:txBody>
+          <a:bodyPr wrap="square" lIns="0" tIns="0" rIns="0" bIns="0" rtlCol="0" anchor="ctr"/>
+          <a:lstStyle/>
+          <a:p>
+            <a:pPr indent="0" marL="0">
+              <a:buNone/>
+            </a:pPr>
+            <a:r>
+              <a:rPr lang="en-US" sz="1300" b="1" dirty="0">
+                <a:solidFill>
+                  <a:schemeClr val="accent1"/>
+                </a:solidFill>
+              </a:rPr>
+              <a:t>六种类型</a:t>
+            </a:r>
+            <a:endParaRPr lang="en-US" sz="1300" dirty="0"/>
+          </a:p>
+        </p:txBody>
+      </p:sp>
+      <p:sp>
+        <p:nvSpPr>
+          <p:cNvPr id="9" name="type0"/>
           <p:cNvSpPr/>
           <p:nvPr/>
         </p:nvSpPr>
         <p:spPr>
           <a:xfrm>
-            <a:off x="457200" y="2414016"/>
-            <a:ext cx="475488" cy="475488"/>
-          </a:xfrm>
-          <a:prstGeom prst="ellipse">
-            <a:avLst/>
-          </a:prstGeom>
-          <a:solidFill>
-            <a:schemeClr val="accent1"/>
-          </a:solidFill>
-          <a:ln/>
-        </p:spPr>
-      </p:sp>
-      <p:sp>
-        <p:nvSpPr>
-          <p:cNvPr id="9" name="Text 7"/>
-          <p:cNvSpPr txBox="1"/>
-          <p:nvPr/>
-        </p:nvSpPr>
-        <p:spPr>
-          <a:xfrm>
-            <a:off x="457200" y="2414016"/>
-            <a:ext cx="475488" cy="475488"/>
-          </a:xfrm>
-          <a:prstGeom prst="rect">
-            <a:avLst/>
-          </a:prstGeom>
-          <a:noFill/>
-          <a:ln/>
-        </p:spPr>
-        <p:txBody>
-          <a:bodyPr wrap="square" lIns="0" tIns="0" rIns="0" bIns="0" rtlCol="0" anchor="ctr"/>
-          <a:lstStyle/>
-          <a:p>
-            <a:pPr algn="ctr" indent="0" marL="0">
-              <a:buNone/>
-            </a:pPr>
-            <a:r>
-              <a:rPr lang="en-US" sz="1000" b="1" dirty="0">
-                <a:solidFill>
-                  <a:srgbClr val="FFFFFF"/>
-                </a:solidFill>
-              </a:rPr>
-              <a:t>2000</a:t>
-            </a:r>
-            <a:endParaRPr lang="en-US" sz="1000" dirty="0"/>
-          </a:p>
-        </p:txBody>
-      </p:sp>
-      <p:sp>
-        <p:nvSpPr>
-          <p:cNvPr id="10" name="Text 8"/>
-          <p:cNvSpPr txBox="1"/>
-          <p:nvPr/>
-        </p:nvSpPr>
-        <p:spPr>
-          <a:xfrm>
-            <a:off x="1005840" y="2377440"/>
-            <a:ext cx="2057400" cy="603504"/>
-          </a:xfrm>
-          <a:prstGeom prst="rect">
-            <a:avLst/>
-          </a:prstGeom>
-          <a:noFill/>
-          <a:ln/>
-        </p:spPr>
-        <p:txBody>
-          <a:bodyPr wrap="square" lIns="0" tIns="0" rIns="0" bIns="0" rtlCol="0" anchor="t"/>
-          <a:lstStyle/>
-          <a:p>
-            <a:pPr indent="0" marL="0">
-              <a:buNone/>
-            </a:pPr>
-            <a:r>
-              <a:rPr lang="en-US" sz="1250" b="1" dirty="0">
-                <a:solidFill>
-                  <a:schemeClr val="tx1"/>
-                </a:solidFill>
-              </a:rPr>
-              <a:t>Bestfoods</a:t>
-            </a:r>
-            <a:endParaRPr lang="en-US" sz="1250" dirty="0"/>
-          </a:p>
-          <a:p>
-            <a:pPr indent="0" marL="0">
-              <a:buNone/>
-            </a:pPr>
-            <a:r>
-              <a:rPr lang="en-US" sz="1050" dirty="0">
-                <a:solidFill>
-                  <a:schemeClr val="accent4"/>
-                </a:solidFill>
-              </a:rPr>
-              <a:t>243 亿美元 · Knorr、Hellmann's</a:t>
-            </a:r>
-            <a:endParaRPr lang="en-US" sz="1250" dirty="0"/>
-          </a:p>
-        </p:txBody>
-      </p:sp>
-      <p:sp>
-        <p:nvSpPr>
-          <p:cNvPr id="11" name="yr01"/>
-          <p:cNvSpPr/>
-          <p:nvPr/>
-        </p:nvSpPr>
-        <p:spPr>
-          <a:xfrm>
-            <a:off x="457200" y="3127248"/>
-            <a:ext cx="475488" cy="475488"/>
-          </a:xfrm>
-          <a:prstGeom prst="ellipse">
-            <a:avLst/>
-          </a:prstGeom>
-          <a:solidFill>
-            <a:schemeClr val="accent1"/>
-          </a:solidFill>
-          <a:ln/>
-        </p:spPr>
-      </p:sp>
-      <p:sp>
-        <p:nvSpPr>
-          <p:cNvPr id="12" name="Text 10"/>
-          <p:cNvSpPr txBox="1"/>
-          <p:nvPr/>
-        </p:nvSpPr>
-        <p:spPr>
-          <a:xfrm>
-            <a:off x="457200" y="3127248"/>
-            <a:ext cx="475488" cy="475488"/>
-          </a:xfrm>
-          <a:prstGeom prst="rect">
-            <a:avLst/>
-          </a:prstGeom>
-          <a:noFill/>
-          <a:ln/>
-        </p:spPr>
-        <p:txBody>
-          <a:bodyPr wrap="square" lIns="0" tIns="0" rIns="0" bIns="0" rtlCol="0" anchor="ctr"/>
-          <a:lstStyle/>
-          <a:p>
-            <a:pPr algn="ctr" indent="0" marL="0">
-              <a:buNone/>
-            </a:pPr>
-            <a:r>
-              <a:rPr lang="en-US" sz="1000" b="1" dirty="0">
-                <a:solidFill>
-                  <a:srgbClr val="FFFFFF"/>
-                </a:solidFill>
-              </a:rPr>
-              <a:t>2000</a:t>
-            </a:r>
-            <a:endParaRPr lang="en-US" sz="1000" dirty="0"/>
-          </a:p>
-        </p:txBody>
-      </p:sp>
-      <p:sp>
-        <p:nvSpPr>
-          <p:cNvPr id="13" name="Text 11"/>
-          <p:cNvSpPr txBox="1"/>
-          <p:nvPr/>
-        </p:nvSpPr>
-        <p:spPr>
-          <a:xfrm>
-            <a:off x="1005840" y="3090672"/>
-            <a:ext cx="2057400" cy="603504"/>
-          </a:xfrm>
-          <a:prstGeom prst="rect">
-            <a:avLst/>
-          </a:prstGeom>
-          <a:noFill/>
-          <a:ln/>
-        </p:spPr>
-        <p:txBody>
-          <a:bodyPr wrap="square" lIns="0" tIns="0" rIns="0" bIns="0" rtlCol="0" anchor="t"/>
-          <a:lstStyle/>
-          <a:p>
-            <a:pPr indent="0" marL="0">
-              <a:buNone/>
-            </a:pPr>
-            <a:r>
-              <a:rPr lang="en-US" sz="1250" b="1" dirty="0">
-                <a:solidFill>
-                  <a:schemeClr val="tx1"/>
-                </a:solidFill>
-              </a:rPr>
-              <a:t>Ben &amp; Jerry's</a:t>
-            </a:r>
-            <a:endParaRPr lang="en-US" sz="1250" dirty="0"/>
-          </a:p>
-          <a:p>
-            <a:pPr indent="0" marL="0">
-              <a:buNone/>
-            </a:pPr>
-            <a:r>
-              <a:rPr lang="en-US" sz="1050" dirty="0">
-                <a:solidFill>
-                  <a:schemeClr val="accent4"/>
-                </a:solidFill>
-              </a:rPr>
-              <a:t>3.26 亿美元 · 独立运营，保留董事会</a:t>
-            </a:r>
-            <a:endParaRPr lang="en-US" sz="1250" dirty="0"/>
-          </a:p>
-        </p:txBody>
-      </p:sp>
-      <p:sp>
-        <p:nvSpPr>
-          <p:cNvPr id="14" name="yr02"/>
-          <p:cNvSpPr/>
-          <p:nvPr/>
-        </p:nvSpPr>
-        <p:spPr>
-          <a:xfrm>
-            <a:off x="457200" y="3840480"/>
-            <a:ext cx="475488" cy="475488"/>
-          </a:xfrm>
-          <a:prstGeom prst="ellipse">
-            <a:avLst/>
-          </a:prstGeom>
-          <a:solidFill>
-            <a:schemeClr val="accent1"/>
-          </a:solidFill>
-          <a:ln/>
-        </p:spPr>
-      </p:sp>
-      <p:sp>
-        <p:nvSpPr>
-          <p:cNvPr id="15" name="Text 13"/>
-          <p:cNvSpPr txBox="1"/>
-          <p:nvPr/>
-        </p:nvSpPr>
-        <p:spPr>
-          <a:xfrm>
-            <a:off x="457200" y="3840480"/>
-            <a:ext cx="475488" cy="475488"/>
-          </a:xfrm>
-          <a:prstGeom prst="rect">
-            <a:avLst/>
-          </a:prstGeom>
-          <a:noFill/>
-          <a:ln/>
-        </p:spPr>
-        <p:txBody>
-          <a:bodyPr wrap="square" lIns="0" tIns="0" rIns="0" bIns="0" rtlCol="0" anchor="ctr"/>
-          <a:lstStyle/>
-          <a:p>
-            <a:pPr algn="ctr" indent="0" marL="0">
-              <a:buNone/>
-            </a:pPr>
-            <a:r>
-              <a:rPr lang="en-US" sz="1000" b="1" dirty="0">
-                <a:solidFill>
-                  <a:srgbClr val="FFFFFF"/>
-                </a:solidFill>
-              </a:rPr>
-              <a:t>2016</a:t>
-            </a:r>
-            <a:endParaRPr lang="en-US" sz="1000" dirty="0"/>
-          </a:p>
-        </p:txBody>
-      </p:sp>
-      <p:sp>
-        <p:nvSpPr>
-          <p:cNvPr id="16" name="Text 14"/>
-          <p:cNvSpPr txBox="1"/>
-          <p:nvPr/>
-        </p:nvSpPr>
-        <p:spPr>
-          <a:xfrm>
-            <a:off x="1005840" y="3803904"/>
-            <a:ext cx="2057400" cy="603504"/>
-          </a:xfrm>
-          <a:prstGeom prst="rect">
-            <a:avLst/>
-          </a:prstGeom>
-          <a:noFill/>
-          <a:ln/>
-        </p:spPr>
-        <p:txBody>
-          <a:bodyPr wrap="square" lIns="0" tIns="0" rIns="0" bIns="0" rtlCol="0" anchor="t"/>
-          <a:lstStyle/>
-          <a:p>
-            <a:pPr indent="0" marL="0">
-              <a:buNone/>
-            </a:pPr>
-            <a:r>
-              <a:rPr lang="en-US" sz="1250" b="1" dirty="0">
-                <a:solidFill>
-                  <a:schemeClr val="tx1"/>
-                </a:solidFill>
-              </a:rPr>
-              <a:t>Dollar Shave Club</a:t>
-            </a:r>
-            <a:endParaRPr lang="en-US" sz="1250" dirty="0"/>
-          </a:p>
-          <a:p>
-            <a:pPr indent="0" marL="0">
-              <a:buNone/>
-            </a:pPr>
-            <a:r>
-              <a:rPr lang="en-US" sz="1050" dirty="0">
-                <a:solidFill>
-                  <a:schemeClr val="accent4"/>
-                </a:solidFill>
-              </a:rPr>
-              <a:t>约 10 亿美元 · 网上直销</a:t>
-            </a:r>
-            <a:endParaRPr lang="en-US" sz="1250" dirty="0"/>
-          </a:p>
-        </p:txBody>
-      </p:sp>
-      <p:sp>
-        <p:nvSpPr>
-          <p:cNvPr id="17" name="phase1"/>
-          <p:cNvSpPr/>
-          <p:nvPr/>
-        </p:nvSpPr>
-        <p:spPr>
-          <a:xfrm>
-            <a:off x="3268980" y="1691640"/>
-            <a:ext cx="2606040" cy="566928"/>
+            <a:off x="3154680" y="1572768"/>
+            <a:ext cx="1280160" cy="365760"/>
           </a:xfrm>
           <a:prstGeom prst="roundRect">
             <a:avLst>
-              <a:gd name="adj" fmla="val 12903"/>
+              <a:gd name="adj" fmla="val 50000"/>
             </a:avLst>
           </a:prstGeom>
           <a:solidFill>
-            <a:schemeClr val="accent3"/>
-          </a:solidFill>
-          <a:ln/>
-        </p:spPr>
-      </p:sp>
-      <p:sp>
-        <p:nvSpPr>
-          <p:cNvPr id="18" name="Text 16"/>
-          <p:cNvSpPr txBox="1"/>
-          <p:nvPr/>
-        </p:nvSpPr>
-        <p:spPr>
-          <a:xfrm>
-            <a:off x="3378708" y="1691640"/>
-            <a:ext cx="2386584" cy="566928"/>
+            <a:srgbClr val="FFFFFF"/>
+          </a:solidFill>
+          <a:ln w="12700">
+            <a:solidFill>
+              <a:schemeClr val="accent1"/>
+            </a:solidFill>
+            <a:prstDash val="solid"/>
+          </a:ln>
+        </p:spPr>
+      </p:sp>
+      <p:sp>
+        <p:nvSpPr>
+          <p:cNvPr id="10" name="Text 8"/>
+          <p:cNvSpPr txBox="1"/>
+          <p:nvPr/>
+        </p:nvSpPr>
+        <p:spPr>
+          <a:xfrm>
+            <a:off x="3154680" y="1572768"/>
+            <a:ext cx="1280160" cy="365760"/>
           </a:xfrm>
           <a:prstGeom prst="rect">
             <a:avLst/>
@@ -1609,264 +1526,387 @@
           <a:bodyPr wrap="square" lIns="0" tIns="0" rIns="0" bIns="0" rtlCol="0" anchor="ctr"/>
           <a:lstStyle/>
           <a:p>
-            <a:pPr indent="0" marL="0">
-              <a:buNone/>
-            </a:pPr>
-            <a:r>
-              <a:rPr lang="en-US" sz="1500" b="1" dirty="0">
-                <a:solidFill>
-                  <a:srgbClr val="FFFFFF"/>
-                </a:solidFill>
-              </a:rPr>
-              <a:t>转折</a:t>
-            </a:r>
-            <a:endParaRPr lang="en-US" sz="1500" dirty="0"/>
-          </a:p>
-          <a:p>
-            <a:pPr indent="0" marL="0">
+            <a:pPr algn="ctr" indent="0" marL="0">
               <a:buNone/>
             </a:pPr>
             <a:r>
               <a:rPr lang="en-US" sz="1050" dirty="0">
                 <a:solidFill>
-                  <a:srgbClr val="FFFFFF"/>
-                </a:solidFill>
-              </a:rPr>
-              <a:t>来自收购方和投资者的压力</a:t>
-            </a:r>
-            <a:endParaRPr lang="en-US" sz="1500" dirty="0"/>
-          </a:p>
-        </p:txBody>
-      </p:sp>
-      <p:sp>
-        <p:nvSpPr>
-          <p:cNvPr id="19" name="yr10"/>
+                  <a:schemeClr val="tx1"/>
+                </a:solidFill>
+              </a:rPr>
+              <a:t>横向</a:t>
+            </a:r>
+            <a:endParaRPr lang="en-US" sz="1050" dirty="0"/>
+          </a:p>
+        </p:txBody>
+      </p:sp>
+      <p:sp>
+        <p:nvSpPr>
+          <p:cNvPr id="11" name="type1"/>
           <p:cNvSpPr/>
           <p:nvPr/>
         </p:nvSpPr>
         <p:spPr>
           <a:xfrm>
-            <a:off x="3268980" y="2414016"/>
-            <a:ext cx="475488" cy="475488"/>
-          </a:xfrm>
-          <a:prstGeom prst="ellipse">
-            <a:avLst/>
-          </a:prstGeom>
-          <a:solidFill>
-            <a:schemeClr val="accent3"/>
-          </a:solidFill>
-          <a:ln/>
-        </p:spPr>
-      </p:sp>
-      <p:sp>
-        <p:nvSpPr>
-          <p:cNvPr id="20" name="Text 18"/>
-          <p:cNvSpPr txBox="1"/>
-          <p:nvPr/>
-        </p:nvSpPr>
-        <p:spPr>
-          <a:xfrm>
-            <a:off x="3268980" y="2414016"/>
-            <a:ext cx="475488" cy="475488"/>
-          </a:xfrm>
-          <a:prstGeom prst="rect">
-            <a:avLst/>
-          </a:prstGeom>
-          <a:noFill/>
-          <a:ln/>
-        </p:spPr>
-        <p:txBody>
-          <a:bodyPr wrap="square" lIns="0" tIns="0" rIns="0" bIns="0" rtlCol="0" anchor="ctr"/>
-          <a:lstStyle/>
-          <a:p>
-            <a:pPr algn="ctr" indent="0" marL="0">
-              <a:buNone/>
-            </a:pPr>
-            <a:r>
-              <a:rPr lang="en-US" sz="1000" b="1" dirty="0">
-                <a:solidFill>
-                  <a:srgbClr val="FFFFFF"/>
-                </a:solidFill>
-              </a:rPr>
-              <a:t>2017</a:t>
-            </a:r>
-            <a:endParaRPr lang="en-US" sz="1000" dirty="0"/>
-          </a:p>
-        </p:txBody>
-      </p:sp>
-      <p:sp>
-        <p:nvSpPr>
-          <p:cNvPr id="21" name="Text 19"/>
-          <p:cNvSpPr txBox="1"/>
-          <p:nvPr/>
-        </p:nvSpPr>
-        <p:spPr>
-          <a:xfrm>
-            <a:off x="3817620" y="2377440"/>
-            <a:ext cx="2057400" cy="603504"/>
-          </a:xfrm>
-          <a:prstGeom prst="rect">
-            <a:avLst/>
-          </a:prstGeom>
-          <a:noFill/>
-          <a:ln/>
-        </p:spPr>
-        <p:txBody>
-          <a:bodyPr wrap="square" lIns="0" tIns="0" rIns="0" bIns="0" rtlCol="0" anchor="t"/>
-          <a:lstStyle/>
-          <a:p>
-            <a:pPr indent="0" marL="0">
-              <a:buNone/>
-            </a:pPr>
-            <a:r>
-              <a:rPr lang="en-US" sz="1250" b="1" dirty="0">
-                <a:solidFill>
-                  <a:schemeClr val="tx1"/>
-                </a:solidFill>
-              </a:rPr>
-              <a:t>Kraft Heinz 收购</a:t>
-            </a:r>
-            <a:endParaRPr lang="en-US" sz="1250" dirty="0"/>
-          </a:p>
-          <a:p>
-            <a:pPr indent="0" marL="0">
-              <a:buNone/>
-            </a:pPr>
-            <a:r>
-              <a:rPr lang="en-US" sz="1050" dirty="0">
-                <a:solidFill>
-                  <a:schemeClr val="accent4"/>
-                </a:solidFill>
-              </a:rPr>
-              <a:t>1,430 亿美元报价被拒，随后撤回</a:t>
-            </a:r>
-            <a:endParaRPr lang="en-US" sz="1250" dirty="0"/>
-          </a:p>
-        </p:txBody>
-      </p:sp>
-      <p:sp>
-        <p:nvSpPr>
-          <p:cNvPr id="22" name="yr11"/>
-          <p:cNvSpPr/>
-          <p:nvPr/>
-        </p:nvSpPr>
-        <p:spPr>
-          <a:xfrm>
-            <a:off x="3268980" y="3127248"/>
-            <a:ext cx="475488" cy="475488"/>
-          </a:xfrm>
-          <a:prstGeom prst="ellipse">
-            <a:avLst/>
-          </a:prstGeom>
-          <a:solidFill>
-            <a:schemeClr val="accent3"/>
-          </a:solidFill>
-          <a:ln/>
-        </p:spPr>
-      </p:sp>
-      <p:sp>
-        <p:nvSpPr>
-          <p:cNvPr id="23" name="Text 21"/>
-          <p:cNvSpPr txBox="1"/>
-          <p:nvPr/>
-        </p:nvSpPr>
-        <p:spPr>
-          <a:xfrm>
-            <a:off x="3268980" y="3127248"/>
-            <a:ext cx="475488" cy="475488"/>
-          </a:xfrm>
-          <a:prstGeom prst="rect">
-            <a:avLst/>
-          </a:prstGeom>
-          <a:noFill/>
-          <a:ln/>
-        </p:spPr>
-        <p:txBody>
-          <a:bodyPr wrap="square" lIns="0" tIns="0" rIns="0" bIns="0" rtlCol="0" anchor="ctr"/>
-          <a:lstStyle/>
-          <a:p>
-            <a:pPr algn="ctr" indent="0" marL="0">
-              <a:buNone/>
-            </a:pPr>
-            <a:r>
-              <a:rPr lang="en-US" sz="1000" b="1" dirty="0">
-                <a:solidFill>
-                  <a:srgbClr val="FFFFFF"/>
-                </a:solidFill>
-              </a:rPr>
-              <a:t>2022</a:t>
-            </a:r>
-            <a:endParaRPr lang="en-US" sz="1000" dirty="0"/>
-          </a:p>
-        </p:txBody>
-      </p:sp>
-      <p:sp>
-        <p:nvSpPr>
-          <p:cNvPr id="24" name="Text 22"/>
-          <p:cNvSpPr txBox="1"/>
-          <p:nvPr/>
-        </p:nvSpPr>
-        <p:spPr>
-          <a:xfrm>
-            <a:off x="3817620" y="3090672"/>
-            <a:ext cx="2057400" cy="603504"/>
-          </a:xfrm>
-          <a:prstGeom prst="rect">
-            <a:avLst/>
-          </a:prstGeom>
-          <a:noFill/>
-          <a:ln/>
-        </p:spPr>
-        <p:txBody>
-          <a:bodyPr wrap="square" lIns="0" tIns="0" rIns="0" bIns="0" rtlCol="0" anchor="t"/>
-          <a:lstStyle/>
-          <a:p>
-            <a:pPr indent="0" marL="0">
-              <a:buNone/>
-            </a:pPr>
-            <a:r>
-              <a:rPr lang="en-US" sz="1250" b="1" dirty="0">
-                <a:solidFill>
-                  <a:schemeClr val="tx1"/>
-                </a:solidFill>
-              </a:rPr>
-              <a:t>GSK 消费者健康</a:t>
-            </a:r>
-            <a:endParaRPr lang="en-US" sz="1250" dirty="0"/>
-          </a:p>
-          <a:p>
-            <a:pPr indent="0" marL="0">
-              <a:buNone/>
-            </a:pPr>
-            <a:r>
-              <a:rPr lang="en-US" sz="1050" dirty="0">
-                <a:solidFill>
-                  <a:schemeClr val="accent4"/>
-                </a:solidFill>
-              </a:rPr>
-              <a:t>500 亿英镑出价，股东反对后放弃</a:t>
-            </a:r>
-            <a:endParaRPr lang="en-US" sz="1250" dirty="0"/>
-          </a:p>
-        </p:txBody>
-      </p:sp>
-      <p:sp>
-        <p:nvSpPr>
-          <p:cNvPr id="25" name="phase2"/>
-          <p:cNvSpPr/>
-          <p:nvPr/>
-        </p:nvSpPr>
-        <p:spPr>
-          <a:xfrm>
-            <a:off x="6080760" y="1691640"/>
-            <a:ext cx="2606040" cy="566928"/>
+            <a:off x="4526280" y="1572768"/>
+            <a:ext cx="1280160" cy="365760"/>
           </a:xfrm>
           <a:prstGeom prst="roundRect">
             <a:avLst>
-              <a:gd name="adj" fmla="val 12903"/>
+              <a:gd name="adj" fmla="val 50000"/>
             </a:avLst>
           </a:prstGeom>
           <a:solidFill>
+            <a:srgbClr val="FFFFFF"/>
+          </a:solidFill>
+          <a:ln w="12700">
+            <a:solidFill>
+              <a:schemeClr val="accent1"/>
+            </a:solidFill>
+            <a:prstDash val="solid"/>
+          </a:ln>
+        </p:spPr>
+      </p:sp>
+      <p:sp>
+        <p:nvSpPr>
+          <p:cNvPr id="12" name="Text 10"/>
+          <p:cNvSpPr txBox="1"/>
+          <p:nvPr/>
+        </p:nvSpPr>
+        <p:spPr>
+          <a:xfrm>
+            <a:off x="4526280" y="1572768"/>
+            <a:ext cx="1280160" cy="365760"/>
+          </a:xfrm>
+          <a:prstGeom prst="rect">
+            <a:avLst/>
+          </a:prstGeom>
+          <a:noFill/>
+          <a:ln/>
+        </p:spPr>
+        <p:txBody>
+          <a:bodyPr wrap="square" lIns="0" tIns="0" rIns="0" bIns="0" rtlCol="0" anchor="ctr"/>
+          <a:lstStyle/>
+          <a:p>
+            <a:pPr algn="ctr" indent="0" marL="0">
+              <a:buNone/>
+            </a:pPr>
+            <a:r>
+              <a:rPr lang="en-US" sz="1050" dirty="0">
+                <a:solidFill>
+                  <a:schemeClr val="tx1"/>
+                </a:solidFill>
+              </a:rPr>
+              <a:t>纵向</a:t>
+            </a:r>
+            <a:endParaRPr lang="en-US" sz="1050" dirty="0"/>
+          </a:p>
+        </p:txBody>
+      </p:sp>
+      <p:sp>
+        <p:nvSpPr>
+          <p:cNvPr id="13" name="type2"/>
+          <p:cNvSpPr/>
+          <p:nvPr/>
+        </p:nvSpPr>
+        <p:spPr>
+          <a:xfrm>
+            <a:off x="3154680" y="2029968"/>
+            <a:ext cx="1280160" cy="365760"/>
+          </a:xfrm>
+          <a:prstGeom prst="roundRect">
+            <a:avLst>
+              <a:gd name="adj" fmla="val 50000"/>
+            </a:avLst>
+          </a:prstGeom>
+          <a:solidFill>
+            <a:srgbClr val="FFFFFF"/>
+          </a:solidFill>
+          <a:ln w="12700">
+            <a:solidFill>
+              <a:schemeClr val="accent1"/>
+            </a:solidFill>
+            <a:prstDash val="solid"/>
+          </a:ln>
+        </p:spPr>
+      </p:sp>
+      <p:sp>
+        <p:nvSpPr>
+          <p:cNvPr id="14" name="Text 12"/>
+          <p:cNvSpPr txBox="1"/>
+          <p:nvPr/>
+        </p:nvSpPr>
+        <p:spPr>
+          <a:xfrm>
+            <a:off x="3154680" y="2029968"/>
+            <a:ext cx="1280160" cy="365760"/>
+          </a:xfrm>
+          <a:prstGeom prst="rect">
+            <a:avLst/>
+          </a:prstGeom>
+          <a:noFill/>
+          <a:ln/>
+        </p:spPr>
+        <p:txBody>
+          <a:bodyPr wrap="square" lIns="0" tIns="0" rIns="0" bIns="0" rtlCol="0" anchor="ctr"/>
+          <a:lstStyle/>
+          <a:p>
+            <a:pPr algn="ctr" indent="0" marL="0">
+              <a:buNone/>
+            </a:pPr>
+            <a:r>
+              <a:rPr lang="en-US" sz="1050" dirty="0">
+                <a:solidFill>
+                  <a:schemeClr val="tx1"/>
+                </a:solidFill>
+              </a:rPr>
+              <a:t>同源</a:t>
+            </a:r>
+            <a:endParaRPr lang="en-US" sz="1050" dirty="0"/>
+          </a:p>
+        </p:txBody>
+      </p:sp>
+      <p:sp>
+        <p:nvSpPr>
+          <p:cNvPr id="15" name="type3"/>
+          <p:cNvSpPr/>
+          <p:nvPr/>
+        </p:nvSpPr>
+        <p:spPr>
+          <a:xfrm>
+            <a:off x="4526280" y="2029968"/>
+            <a:ext cx="1280160" cy="365760"/>
+          </a:xfrm>
+          <a:prstGeom prst="roundRect">
+            <a:avLst>
+              <a:gd name="adj" fmla="val 50000"/>
+            </a:avLst>
+          </a:prstGeom>
+          <a:solidFill>
+            <a:srgbClr val="FFFFFF"/>
+          </a:solidFill>
+          <a:ln w="12700">
+            <a:solidFill>
+              <a:schemeClr val="accent1"/>
+            </a:solidFill>
+            <a:prstDash val="solid"/>
+          </a:ln>
+        </p:spPr>
+      </p:sp>
+      <p:sp>
+        <p:nvSpPr>
+          <p:cNvPr id="16" name="Text 14"/>
+          <p:cNvSpPr txBox="1"/>
+          <p:nvPr/>
+        </p:nvSpPr>
+        <p:spPr>
+          <a:xfrm>
+            <a:off x="4526280" y="2029968"/>
+            <a:ext cx="1280160" cy="365760"/>
+          </a:xfrm>
+          <a:prstGeom prst="rect">
+            <a:avLst/>
+          </a:prstGeom>
+          <a:noFill/>
+          <a:ln/>
+        </p:spPr>
+        <p:txBody>
+          <a:bodyPr wrap="square" lIns="0" tIns="0" rIns="0" bIns="0" rtlCol="0" anchor="ctr"/>
+          <a:lstStyle/>
+          <a:p>
+            <a:pPr algn="ctr" indent="0" marL="0">
+              <a:buNone/>
+            </a:pPr>
+            <a:r>
+              <a:rPr lang="en-US" sz="1050" dirty="0">
+                <a:solidFill>
+                  <a:schemeClr val="tx1"/>
+                </a:solidFill>
+              </a:rPr>
+              <a:t>市场扩展</a:t>
+            </a:r>
+            <a:endParaRPr lang="en-US" sz="1050" dirty="0"/>
+          </a:p>
+        </p:txBody>
+      </p:sp>
+      <p:sp>
+        <p:nvSpPr>
+          <p:cNvPr id="17" name="type4"/>
+          <p:cNvSpPr/>
+          <p:nvPr/>
+        </p:nvSpPr>
+        <p:spPr>
+          <a:xfrm>
+            <a:off x="3154680" y="2487168"/>
+            <a:ext cx="1280160" cy="365760"/>
+          </a:xfrm>
+          <a:prstGeom prst="roundRect">
+            <a:avLst>
+              <a:gd name="adj" fmla="val 50000"/>
+            </a:avLst>
+          </a:prstGeom>
+          <a:solidFill>
+            <a:srgbClr val="FFFFFF"/>
+          </a:solidFill>
+          <a:ln w="12700">
+            <a:solidFill>
+              <a:schemeClr val="accent1"/>
+            </a:solidFill>
+            <a:prstDash val="solid"/>
+          </a:ln>
+        </p:spPr>
+      </p:sp>
+      <p:sp>
+        <p:nvSpPr>
+          <p:cNvPr id="18" name="Text 16"/>
+          <p:cNvSpPr txBox="1"/>
+          <p:nvPr/>
+        </p:nvSpPr>
+        <p:spPr>
+          <a:xfrm>
+            <a:off x="3154680" y="2487168"/>
+            <a:ext cx="1280160" cy="365760"/>
+          </a:xfrm>
+          <a:prstGeom prst="rect">
+            <a:avLst/>
+          </a:prstGeom>
+          <a:noFill/>
+          <a:ln/>
+        </p:spPr>
+        <p:txBody>
+          <a:bodyPr wrap="square" lIns="0" tIns="0" rIns="0" bIns="0" rtlCol="0" anchor="ctr"/>
+          <a:lstStyle/>
+          <a:p>
+            <a:pPr algn="ctr" indent="0" marL="0">
+              <a:buNone/>
+            </a:pPr>
+            <a:r>
+              <a:rPr lang="en-US" sz="1050" dirty="0">
+                <a:solidFill>
+                  <a:schemeClr val="tx1"/>
+                </a:solidFill>
+              </a:rPr>
+              <a:t>产品扩展</a:t>
+            </a:r>
+            <a:endParaRPr lang="en-US" sz="1050" dirty="0"/>
+          </a:p>
+        </p:txBody>
+      </p:sp>
+      <p:sp>
+        <p:nvSpPr>
+          <p:cNvPr id="19" name="type5"/>
+          <p:cNvSpPr/>
+          <p:nvPr/>
+        </p:nvSpPr>
+        <p:spPr>
+          <a:xfrm>
+            <a:off x="4526280" y="2487168"/>
+            <a:ext cx="1280160" cy="365760"/>
+          </a:xfrm>
+          <a:prstGeom prst="roundRect">
+            <a:avLst>
+              <a:gd name="adj" fmla="val 50000"/>
+            </a:avLst>
+          </a:prstGeom>
+          <a:solidFill>
+            <a:srgbClr val="FFFFFF"/>
+          </a:solidFill>
+          <a:ln w="12700">
+            <a:solidFill>
+              <a:schemeClr val="accent1"/>
+            </a:solidFill>
+            <a:prstDash val="solid"/>
+          </a:ln>
+        </p:spPr>
+      </p:sp>
+      <p:sp>
+        <p:nvSpPr>
+          <p:cNvPr id="20" name="Text 18"/>
+          <p:cNvSpPr txBox="1"/>
+          <p:nvPr/>
+        </p:nvSpPr>
+        <p:spPr>
+          <a:xfrm>
+            <a:off x="4526280" y="2487168"/>
+            <a:ext cx="1280160" cy="365760"/>
+          </a:xfrm>
+          <a:prstGeom prst="rect">
+            <a:avLst/>
+          </a:prstGeom>
+          <a:noFill/>
+          <a:ln/>
+        </p:spPr>
+        <p:txBody>
+          <a:bodyPr wrap="square" lIns="0" tIns="0" rIns="0" bIns="0" rtlCol="0" anchor="ctr"/>
+          <a:lstStyle/>
+          <a:p>
+            <a:pPr algn="ctr" indent="0" marL="0">
+              <a:buNone/>
+            </a:pPr>
+            <a:r>
+              <a:rPr lang="en-US" sz="1050" dirty="0">
+                <a:solidFill>
+                  <a:schemeClr val="tx1"/>
+                </a:solidFill>
+              </a:rPr>
+              <a:t>混合</a:t>
+            </a:r>
+            <a:endParaRPr lang="en-US" sz="1050" dirty="0"/>
+          </a:p>
+        </p:txBody>
+      </p:sp>
+      <p:sp>
+        <p:nvSpPr>
+          <p:cNvPr id="21" name="Text 19"/>
+          <p:cNvSpPr txBox="1"/>
+          <p:nvPr/>
+        </p:nvSpPr>
+        <p:spPr>
+          <a:xfrm>
+            <a:off x="6080760" y="1234440"/>
+            <a:ext cx="2606040" cy="274320"/>
+          </a:xfrm>
+          <a:prstGeom prst="rect">
+            <a:avLst/>
+          </a:prstGeom>
+          <a:noFill/>
+          <a:ln/>
+        </p:spPr>
+        <p:txBody>
+          <a:bodyPr wrap="square" lIns="0" tIns="0" rIns="0" bIns="0" rtlCol="0" anchor="ctr"/>
+          <a:lstStyle/>
+          <a:p>
+            <a:pPr indent="0" marL="0">
+              <a:buNone/>
+            </a:pPr>
+            <a:r>
+              <a:rPr lang="en-US" sz="1300" b="1" dirty="0">
+                <a:solidFill>
+                  <a:schemeClr val="accent2"/>
+                </a:solidFill>
+              </a:rPr>
+              <a:t>四种整合方式</a:t>
+            </a:r>
+            <a:endParaRPr lang="en-US" sz="1300" dirty="0"/>
+          </a:p>
+        </p:txBody>
+      </p:sp>
+      <p:sp>
+        <p:nvSpPr>
+          <p:cNvPr id="22" name="intdot0"/>
+          <p:cNvSpPr/>
+          <p:nvPr/>
+        </p:nvSpPr>
+        <p:spPr>
+          <a:xfrm>
+            <a:off x="6080760" y="1636776"/>
+            <a:ext cx="182880" cy="182880"/>
+          </a:xfrm>
+          <a:prstGeom prst="ellipse">
+            <a:avLst/>
+          </a:prstGeom>
+          <a:solidFill>
             <a:schemeClr val="accent2"/>
           </a:solidFill>
           <a:ln/>
@@ -1874,14 +1914,14 @@
       </p:sp>
       <p:sp>
         <p:nvSpPr>
-          <p:cNvPr id="26" name="Text 24"/>
-          <p:cNvSpPr txBox="1"/>
-          <p:nvPr/>
-        </p:nvSpPr>
-        <p:spPr>
-          <a:xfrm>
-            <a:off x="6190488" y="1691640"/>
-            <a:ext cx="2386584" cy="566928"/>
+          <p:cNvPr id="23" name="Text 21"/>
+          <p:cNvSpPr txBox="1"/>
+          <p:nvPr/>
+        </p:nvSpPr>
+        <p:spPr>
+          <a:xfrm>
+            <a:off x="6355080" y="1572768"/>
+            <a:ext cx="2286000" cy="310896"/>
           </a:xfrm>
           <a:prstGeom prst="rect">
             <a:avLst/>
@@ -1897,61 +1937,336 @@
               <a:buNone/>
             </a:pPr>
             <a:r>
-              <a:rPr lang="en-US" sz="1500" b="1" dirty="0">
+              <a:rPr lang="en-US" sz="1200" dirty="0">
+                <a:solidFill>
+                  <a:schemeClr val="tx1"/>
+                </a:solidFill>
+              </a:rPr>
+              <a:t>独立运营</a:t>
+            </a:r>
+            <a:endParaRPr lang="en-US" sz="1200" dirty="0"/>
+          </a:p>
+        </p:txBody>
+      </p:sp>
+      <p:sp>
+        <p:nvSpPr>
+          <p:cNvPr id="24" name="intdot1"/>
+          <p:cNvSpPr/>
+          <p:nvPr/>
+        </p:nvSpPr>
+        <p:spPr>
+          <a:xfrm>
+            <a:off x="6080760" y="1984248"/>
+            <a:ext cx="182880" cy="182880"/>
+          </a:xfrm>
+          <a:prstGeom prst="ellipse">
+            <a:avLst/>
+          </a:prstGeom>
+          <a:solidFill>
+            <a:schemeClr val="accent2"/>
+          </a:solidFill>
+          <a:ln/>
+        </p:spPr>
+      </p:sp>
+      <p:sp>
+        <p:nvSpPr>
+          <p:cNvPr id="25" name="Text 23"/>
+          <p:cNvSpPr txBox="1"/>
+          <p:nvPr/>
+        </p:nvSpPr>
+        <p:spPr>
+          <a:xfrm>
+            <a:off x="6355080" y="1920240"/>
+            <a:ext cx="2286000" cy="310896"/>
+          </a:xfrm>
+          <a:prstGeom prst="rect">
+            <a:avLst/>
+          </a:prstGeom>
+          <a:noFill/>
+          <a:ln/>
+        </p:spPr>
+        <p:txBody>
+          <a:bodyPr wrap="square" lIns="0" tIns="0" rIns="0" bIns="0" rtlCol="0" anchor="ctr"/>
+          <a:lstStyle/>
+          <a:p>
+            <a:pPr indent="0" marL="0">
+              <a:buNone/>
+            </a:pPr>
+            <a:r>
+              <a:rPr lang="en-US" sz="1200" dirty="0">
+                <a:solidFill>
+                  <a:schemeClr val="tx1"/>
+                </a:solidFill>
+              </a:rPr>
+              <a:t>定向整合</a:t>
+            </a:r>
+            <a:endParaRPr lang="en-US" sz="1200" dirty="0"/>
+          </a:p>
+        </p:txBody>
+      </p:sp>
+      <p:sp>
+        <p:nvSpPr>
+          <p:cNvPr id="26" name="intdot2"/>
+          <p:cNvSpPr/>
+          <p:nvPr/>
+        </p:nvSpPr>
+        <p:spPr>
+          <a:xfrm>
+            <a:off x="6080760" y="2331720"/>
+            <a:ext cx="182880" cy="182880"/>
+          </a:xfrm>
+          <a:prstGeom prst="ellipse">
+            <a:avLst/>
+          </a:prstGeom>
+          <a:solidFill>
+            <a:schemeClr val="accent2"/>
+          </a:solidFill>
+          <a:ln/>
+        </p:spPr>
+      </p:sp>
+      <p:sp>
+        <p:nvSpPr>
+          <p:cNvPr id="27" name="Text 25"/>
+          <p:cNvSpPr txBox="1"/>
+          <p:nvPr/>
+        </p:nvSpPr>
+        <p:spPr>
+          <a:xfrm>
+            <a:off x="6355080" y="2267712"/>
+            <a:ext cx="2286000" cy="310896"/>
+          </a:xfrm>
+          <a:prstGeom prst="rect">
+            <a:avLst/>
+          </a:prstGeom>
+          <a:noFill/>
+          <a:ln/>
+        </p:spPr>
+        <p:txBody>
+          <a:bodyPr wrap="square" lIns="0" tIns="0" rIns="0" bIns="0" rtlCol="0" anchor="ctr"/>
+          <a:lstStyle/>
+          <a:p>
+            <a:pPr indent="0" marL="0">
+              <a:buNone/>
+            </a:pPr>
+            <a:r>
+              <a:rPr lang="en-US" sz="1200" dirty="0">
+                <a:solidFill>
+                  <a:schemeClr val="tx1"/>
+                </a:solidFill>
+              </a:rPr>
+              <a:t>完全整合</a:t>
+            </a:r>
+            <a:endParaRPr lang="en-US" sz="1200" dirty="0"/>
+          </a:p>
+        </p:txBody>
+      </p:sp>
+      <p:sp>
+        <p:nvSpPr>
+          <p:cNvPr id="28" name="intdot3"/>
+          <p:cNvSpPr/>
+          <p:nvPr/>
+        </p:nvSpPr>
+        <p:spPr>
+          <a:xfrm>
+            <a:off x="6080760" y="2679192"/>
+            <a:ext cx="182880" cy="182880"/>
+          </a:xfrm>
+          <a:prstGeom prst="ellipse">
+            <a:avLst/>
+          </a:prstGeom>
+          <a:solidFill>
+            <a:schemeClr val="accent2"/>
+          </a:solidFill>
+          <a:ln/>
+        </p:spPr>
+      </p:sp>
+      <p:sp>
+        <p:nvSpPr>
+          <p:cNvPr id="29" name="Text 27"/>
+          <p:cNvSpPr txBox="1"/>
+          <p:nvPr/>
+        </p:nvSpPr>
+        <p:spPr>
+          <a:xfrm>
+            <a:off x="6355080" y="2615184"/>
+            <a:ext cx="2286000" cy="310896"/>
+          </a:xfrm>
+          <a:prstGeom prst="rect">
+            <a:avLst/>
+          </a:prstGeom>
+          <a:noFill/>
+          <a:ln/>
+        </p:spPr>
+        <p:txBody>
+          <a:bodyPr wrap="square" lIns="0" tIns="0" rIns="0" bIns="0" rtlCol="0" anchor="ctr"/>
+          <a:lstStyle/>
+          <a:p>
+            <a:pPr indent="0" marL="0">
+              <a:buNone/>
+            </a:pPr>
+            <a:r>
+              <a:rPr lang="en-US" sz="1200" dirty="0">
+                <a:solidFill>
+                  <a:schemeClr val="tx1"/>
+                </a:solidFill>
+              </a:rPr>
+              <a:t>职能整合</a:t>
+            </a:r>
+            <a:endParaRPr lang="en-US" sz="1200" dirty="0"/>
+          </a:p>
+        </p:txBody>
+      </p:sp>
+      <p:sp>
+        <p:nvSpPr>
+          <p:cNvPr id="30" name="Text 28"/>
+          <p:cNvSpPr txBox="1"/>
+          <p:nvPr/>
+        </p:nvSpPr>
+        <p:spPr>
+          <a:xfrm>
+            <a:off x="6080760" y="3017520"/>
+            <a:ext cx="2606040" cy="320040"/>
+          </a:xfrm>
+          <a:prstGeom prst="rect">
+            <a:avLst/>
+          </a:prstGeom>
+          <a:noFill/>
+          <a:ln/>
+        </p:spPr>
+        <p:txBody>
+          <a:bodyPr wrap="square" lIns="0" tIns="0" rIns="0" bIns="0" rtlCol="0" anchor="ctr"/>
+          <a:lstStyle/>
+          <a:p>
+            <a:pPr indent="0" marL="0">
+              <a:buNone/>
+            </a:pPr>
+            <a:r>
+              <a:rPr lang="en-US" sz="1300" b="1" dirty="0">
+                <a:solidFill>
+                  <a:schemeClr val="accent2"/>
+                </a:solidFill>
+              </a:rPr>
+              <a:t>协同效应  </a:t>
+            </a:r>
+            <a:pPr indent="0" marL="0">
+              <a:buNone/>
+            </a:pPr>
+            <a:r>
+              <a:rPr lang="en-US" sz="1300" b="1" dirty="0">
+                <a:solidFill>
+                  <a:schemeClr val="tx1"/>
+                </a:solidFill>
+              </a:rPr>
+              <a:t>1 + 1 &gt; 2</a:t>
+            </a:r>
+            <a:endParaRPr lang="en-US" sz="1300" dirty="0"/>
+          </a:p>
+        </p:txBody>
+      </p:sp>
+      <p:sp>
+        <p:nvSpPr>
+          <p:cNvPr id="31" name="stat"/>
+          <p:cNvSpPr/>
+          <p:nvPr/>
+        </p:nvSpPr>
+        <p:spPr>
+          <a:xfrm>
+            <a:off x="457200" y="3520440"/>
+            <a:ext cx="8229600" cy="685800"/>
+          </a:xfrm>
+          <a:prstGeom prst="roundRect">
+            <a:avLst>
+              <a:gd name="adj" fmla="val 13333"/>
+            </a:avLst>
+          </a:prstGeom>
+          <a:solidFill>
+            <a:schemeClr val="accent3"/>
+          </a:solidFill>
+          <a:ln/>
+        </p:spPr>
+      </p:sp>
+      <p:sp>
+        <p:nvSpPr>
+          <p:cNvPr id="32" name="Text 30"/>
+          <p:cNvSpPr txBox="1"/>
+          <p:nvPr/>
+        </p:nvSpPr>
+        <p:spPr>
+          <a:xfrm>
+            <a:off x="640080" y="3520440"/>
+            <a:ext cx="1554480" cy="685800"/>
+          </a:xfrm>
+          <a:prstGeom prst="rect">
+            <a:avLst/>
+          </a:prstGeom>
+          <a:noFill/>
+          <a:ln/>
+        </p:spPr>
+        <p:txBody>
+          <a:bodyPr wrap="square" lIns="0" tIns="0" rIns="0" bIns="0" rtlCol="0" anchor="ctr"/>
+          <a:lstStyle/>
+          <a:p>
+            <a:pPr indent="0" marL="0">
+              <a:buNone/>
+            </a:pPr>
+            <a:r>
+              <a:rPr lang="en-US" sz="2800" b="1" dirty="0">
                 <a:solidFill>
                   <a:srgbClr val="FFFFFF"/>
                 </a:solidFill>
               </a:rPr>
-              <a:t>卖</a:t>
-            </a:r>
-            <a:endParaRPr lang="en-US" sz="1500" dirty="0"/>
-          </a:p>
-          <a:p>
-            <a:pPr indent="0" marL="0">
-              <a:buNone/>
-            </a:pPr>
-            <a:r>
-              <a:rPr lang="en-US" sz="1050" dirty="0">
+              <a:t>70–90%</a:t>
+            </a:r>
+            <a:endParaRPr lang="en-US" sz="2800" dirty="0"/>
+          </a:p>
+        </p:txBody>
+      </p:sp>
+      <p:sp>
+        <p:nvSpPr>
+          <p:cNvPr id="33" name="Text 31"/>
+          <p:cNvSpPr txBox="1"/>
+          <p:nvPr/>
+        </p:nvSpPr>
+        <p:spPr>
+          <a:xfrm>
+            <a:off x="2240280" y="3520440"/>
+            <a:ext cx="6309360" cy="685800"/>
+          </a:xfrm>
+          <a:prstGeom prst="rect">
+            <a:avLst/>
+          </a:prstGeom>
+          <a:noFill/>
+          <a:ln/>
+        </p:spPr>
+        <p:txBody>
+          <a:bodyPr wrap="square" lIns="0" tIns="0" rIns="0" bIns="0" rtlCol="0" anchor="ctr"/>
+          <a:lstStyle/>
+          <a:p>
+            <a:pPr indent="0" marL="0">
+              <a:buNone/>
+            </a:pPr>
+            <a:r>
+              <a:rPr lang="en-US" sz="1400" b="1" dirty="0">
                 <a:solidFill>
                   <a:srgbClr val="FFFFFF"/>
                 </a:solidFill>
               </a:rPr>
-              <a:t>简化业务、聚焦核心</a:t>
-            </a:r>
-            <a:endParaRPr lang="en-US" sz="1500" dirty="0"/>
-          </a:p>
-        </p:txBody>
-      </p:sp>
-      <p:sp>
-        <p:nvSpPr>
-          <p:cNvPr id="27" name="yr20"/>
-          <p:cNvSpPr/>
-          <p:nvPr/>
-        </p:nvSpPr>
-        <p:spPr>
-          <a:xfrm>
-            <a:off x="6080760" y="2414016"/>
-            <a:ext cx="475488" cy="475488"/>
-          </a:xfrm>
-          <a:prstGeom prst="ellipse">
-            <a:avLst/>
-          </a:prstGeom>
-          <a:solidFill>
-            <a:schemeClr val="accent2"/>
-          </a:solidFill>
-          <a:ln/>
-        </p:spPr>
-      </p:sp>
-      <p:sp>
-        <p:nvSpPr>
-          <p:cNvPr id="28" name="Text 26"/>
-          <p:cNvSpPr txBox="1"/>
-          <p:nvPr/>
-        </p:nvSpPr>
-        <p:spPr>
-          <a:xfrm>
-            <a:off x="6080760" y="2414016"/>
-            <a:ext cx="475488" cy="475488"/>
+              <a:t>的并购会失败，主要原因是整合难</a:t>
+            </a:r>
+            <a:endParaRPr lang="en-US" sz="1400" dirty="0"/>
+          </a:p>
+        </p:txBody>
+      </p:sp>
+      <p:sp>
+        <p:nvSpPr>
+          <p:cNvPr id="34" name="Text 32"/>
+          <p:cNvSpPr txBox="1"/>
+          <p:nvPr/>
+        </p:nvSpPr>
+        <p:spPr>
+          <a:xfrm>
+            <a:off x="457200" y="4297680"/>
+            <a:ext cx="8229600" cy="320040"/>
           </a:xfrm>
           <a:prstGeom prst="rect">
             <a:avLst/>
@@ -1963,316 +2278,54 @@
           <a:bodyPr wrap="square" lIns="0" tIns="0" rIns="0" bIns="0" rtlCol="0" anchor="ctr"/>
           <a:lstStyle/>
           <a:p>
-            <a:pPr algn="ctr" indent="0" marL="0">
-              <a:buNone/>
-            </a:pPr>
-            <a:r>
-              <a:rPr lang="en-US" sz="1000" b="1" dirty="0">
-                <a:solidFill>
-                  <a:srgbClr val="FFFFFF"/>
-                </a:solidFill>
-              </a:rPr>
-              <a:t>2023</a:t>
-            </a:r>
-            <a:endParaRPr lang="en-US" sz="1000" dirty="0"/>
-          </a:p>
-        </p:txBody>
-      </p:sp>
-      <p:sp>
-        <p:nvSpPr>
-          <p:cNvPr id="29" name="Text 27"/>
-          <p:cNvSpPr txBox="1"/>
-          <p:nvPr/>
-        </p:nvSpPr>
-        <p:spPr>
-          <a:xfrm>
-            <a:off x="6629400" y="2377440"/>
-            <a:ext cx="2057400" cy="603504"/>
-          </a:xfrm>
-          <a:prstGeom prst="rect">
-            <a:avLst/>
-          </a:prstGeom>
-          <a:noFill/>
-          <a:ln/>
-        </p:spPr>
-        <p:txBody>
-          <a:bodyPr wrap="square" lIns="0" tIns="0" rIns="0" bIns="0" rtlCol="0" anchor="t"/>
-          <a:lstStyle/>
-          <a:p>
-            <a:pPr indent="0" marL="0">
-              <a:buNone/>
-            </a:pPr>
-            <a:r>
-              <a:rPr lang="en-US" sz="1250" b="1" dirty="0">
-                <a:solidFill>
-                  <a:schemeClr val="tx1"/>
-                </a:solidFill>
-              </a:rPr>
-              <a:t>Dollar Shave Club</a:t>
-            </a:r>
-            <a:endParaRPr lang="en-US" sz="1250" dirty="0"/>
-          </a:p>
-          <a:p>
-            <a:pPr indent="0" marL="0">
-              <a:buNone/>
-            </a:pPr>
-            <a:r>
-              <a:rPr lang="en-US" sz="1050" dirty="0">
+            <a:pPr indent="0" marL="0">
+              <a:buNone/>
+            </a:pPr>
+            <a:r>
+              <a:rPr lang="en-US" sz="1300" i="1" dirty="0">
+                <a:solidFill>
+                  <a:schemeClr val="tx2"/>
+                </a:solidFill>
+              </a:rPr>
+              <a:t>跨国并购是 FDI 的一种方式（另一种是自己新建，greenfield）。</a:t>
+            </a:r>
+            <a:endParaRPr lang="en-US" sz="1300" dirty="0"/>
+          </a:p>
+        </p:txBody>
+      </p:sp>
+      <p:sp>
+        <p:nvSpPr>
+          <p:cNvPr id="35" name="Text 33"/>
+          <p:cNvSpPr txBox="1"/>
+          <p:nvPr/>
+        </p:nvSpPr>
+        <p:spPr>
+          <a:xfrm>
+            <a:off x="457200" y="4709160"/>
+            <a:ext cx="8229600" cy="274320"/>
+          </a:xfrm>
+          <a:prstGeom prst="rect">
+            <a:avLst/>
+          </a:prstGeom>
+          <a:noFill/>
+          <a:ln/>
+        </p:spPr>
+        <p:txBody>
+          <a:bodyPr wrap="square" lIns="0" tIns="0" rIns="0" bIns="0" rtlCol="0" anchor="ctr"/>
+          <a:lstStyle/>
+          <a:p>
+            <a:pPr indent="0" marL="0">
+              <a:buNone/>
+            </a:pPr>
+            <a:r>
+              <a:rPr lang="en-US" sz="850" dirty="0">
                 <a:solidFill>
                   <a:schemeClr val="accent4"/>
                 </a:solidFill>
               </a:rPr>
-              <a:t>卖出多数股权</a:t>
-            </a:r>
-            <a:endParaRPr lang="en-US" sz="1250" dirty="0"/>
-          </a:p>
-        </p:txBody>
-      </p:sp>
-      <p:sp>
-        <p:nvSpPr>
-          <p:cNvPr id="30" name="yr21"/>
-          <p:cNvSpPr/>
-          <p:nvPr/>
-        </p:nvSpPr>
-        <p:spPr>
-          <a:xfrm>
-            <a:off x="6080760" y="3127248"/>
-            <a:ext cx="475488" cy="475488"/>
-          </a:xfrm>
-          <a:prstGeom prst="ellipse">
-            <a:avLst/>
-          </a:prstGeom>
-          <a:solidFill>
-            <a:schemeClr val="accent2"/>
-          </a:solidFill>
-          <a:ln/>
-        </p:spPr>
-      </p:sp>
-      <p:sp>
-        <p:nvSpPr>
-          <p:cNvPr id="31" name="Text 29"/>
-          <p:cNvSpPr txBox="1"/>
-          <p:nvPr/>
-        </p:nvSpPr>
-        <p:spPr>
-          <a:xfrm>
-            <a:off x="6080760" y="3127248"/>
-            <a:ext cx="475488" cy="475488"/>
-          </a:xfrm>
-          <a:prstGeom prst="rect">
-            <a:avLst/>
-          </a:prstGeom>
-          <a:noFill/>
-          <a:ln/>
-        </p:spPr>
-        <p:txBody>
-          <a:bodyPr wrap="square" lIns="0" tIns="0" rIns="0" bIns="0" rtlCol="0" anchor="ctr"/>
-          <a:lstStyle/>
-          <a:p>
-            <a:pPr algn="ctr" indent="0" marL="0">
-              <a:buNone/>
-            </a:pPr>
-            <a:r>
-              <a:rPr lang="en-US" sz="1000" b="1" dirty="0">
-                <a:solidFill>
-                  <a:srgbClr val="FFFFFF"/>
-                </a:solidFill>
-              </a:rPr>
-              <a:t>2025</a:t>
-            </a:r>
-            <a:endParaRPr lang="en-US" sz="1000" dirty="0"/>
-          </a:p>
-        </p:txBody>
-      </p:sp>
-      <p:sp>
-        <p:nvSpPr>
-          <p:cNvPr id="32" name="Text 30"/>
-          <p:cNvSpPr txBox="1"/>
-          <p:nvPr/>
-        </p:nvSpPr>
-        <p:spPr>
-          <a:xfrm>
-            <a:off x="6629400" y="3090672"/>
-            <a:ext cx="2057400" cy="603504"/>
-          </a:xfrm>
-          <a:prstGeom prst="rect">
-            <a:avLst/>
-          </a:prstGeom>
-          <a:noFill/>
-          <a:ln/>
-        </p:spPr>
-        <p:txBody>
-          <a:bodyPr wrap="square" lIns="0" tIns="0" rIns="0" bIns="0" rtlCol="0" anchor="t"/>
-          <a:lstStyle/>
-          <a:p>
-            <a:pPr indent="0" marL="0">
-              <a:buNone/>
-            </a:pPr>
-            <a:r>
-              <a:rPr lang="en-US" sz="1250" b="1" dirty="0">
-                <a:solidFill>
-                  <a:schemeClr val="tx1"/>
-                </a:solidFill>
-              </a:rPr>
-              <a:t>冰淇淋 → Magnum</a:t>
-            </a:r>
-            <a:endParaRPr lang="en-US" sz="1250" dirty="0"/>
-          </a:p>
-          <a:p>
-            <a:pPr indent="0" marL="0">
-              <a:buNone/>
-            </a:pPr>
-            <a:r>
-              <a:rPr lang="en-US" sz="1050" dirty="0">
-                <a:solidFill>
-                  <a:schemeClr val="accent4"/>
-                </a:solidFill>
-              </a:rPr>
-              <a:t>分拆并独立上市</a:t>
-            </a:r>
-            <a:endParaRPr lang="en-US" sz="1250" dirty="0"/>
-          </a:p>
-        </p:txBody>
-      </p:sp>
-      <p:sp>
-        <p:nvSpPr>
-          <p:cNvPr id="33" name="yr22"/>
-          <p:cNvSpPr/>
-          <p:nvPr/>
-        </p:nvSpPr>
-        <p:spPr>
-          <a:xfrm>
-            <a:off x="6080760" y="3840480"/>
-            <a:ext cx="475488" cy="475488"/>
-          </a:xfrm>
-          <a:prstGeom prst="ellipse">
-            <a:avLst/>
-          </a:prstGeom>
-          <a:solidFill>
-            <a:schemeClr val="accent2"/>
-          </a:solidFill>
-          <a:ln/>
-        </p:spPr>
-      </p:sp>
-      <p:sp>
-        <p:nvSpPr>
-          <p:cNvPr id="34" name="Text 32"/>
-          <p:cNvSpPr txBox="1"/>
-          <p:nvPr/>
-        </p:nvSpPr>
-        <p:spPr>
-          <a:xfrm>
-            <a:off x="6080760" y="3840480"/>
-            <a:ext cx="475488" cy="475488"/>
-          </a:xfrm>
-          <a:prstGeom prst="rect">
-            <a:avLst/>
-          </a:prstGeom>
-          <a:noFill/>
-          <a:ln/>
-        </p:spPr>
-        <p:txBody>
-          <a:bodyPr wrap="square" lIns="0" tIns="0" rIns="0" bIns="0" rtlCol="0" anchor="ctr"/>
-          <a:lstStyle/>
-          <a:p>
-            <a:pPr algn="ctr" indent="0" marL="0">
-              <a:buNone/>
-            </a:pPr>
-            <a:r>
-              <a:rPr lang="en-US" sz="1000" b="1" dirty="0">
-                <a:solidFill>
-                  <a:srgbClr val="FFFFFF"/>
-                </a:solidFill>
-              </a:rPr>
-              <a:t>2026</a:t>
-            </a:r>
-            <a:endParaRPr lang="en-US" sz="1000" dirty="0"/>
-          </a:p>
-        </p:txBody>
-      </p:sp>
-      <p:sp>
-        <p:nvSpPr>
-          <p:cNvPr id="35" name="Text 33"/>
-          <p:cNvSpPr txBox="1"/>
-          <p:nvPr/>
-        </p:nvSpPr>
-        <p:spPr>
-          <a:xfrm>
-            <a:off x="6629400" y="3803904"/>
-            <a:ext cx="2057400" cy="603504"/>
-          </a:xfrm>
-          <a:prstGeom prst="rect">
-            <a:avLst/>
-          </a:prstGeom>
-          <a:noFill/>
-          <a:ln/>
-        </p:spPr>
-        <p:txBody>
-          <a:bodyPr wrap="square" lIns="0" tIns="0" rIns="0" bIns="0" rtlCol="0" anchor="t"/>
-          <a:lstStyle/>
-          <a:p>
-            <a:pPr indent="0" marL="0">
-              <a:buNone/>
-            </a:pPr>
-            <a:r>
-              <a:rPr lang="en-US" sz="1250" b="1" dirty="0">
-                <a:solidFill>
-                  <a:schemeClr val="tx1"/>
-                </a:solidFill>
-              </a:rPr>
-              <a:t>食品 → McCormick</a:t>
-            </a:r>
-            <a:endParaRPr lang="en-US" sz="1250" dirty="0"/>
-          </a:p>
-          <a:p>
-            <a:pPr indent="0" marL="0">
-              <a:buNone/>
-            </a:pPr>
-            <a:r>
-              <a:rPr lang="en-US" sz="1050" dirty="0">
-                <a:solidFill>
-                  <a:schemeClr val="accent4"/>
-                </a:solidFill>
-              </a:rPr>
-              <a:t>448 亿美元，已宣布，预计 2027 年完成</a:t>
-            </a:r>
-            <a:endParaRPr lang="en-US" sz="1250" dirty="0"/>
-          </a:p>
-        </p:txBody>
-      </p:sp>
-      <p:sp>
-        <p:nvSpPr>
-          <p:cNvPr id="36" name="Text 34"/>
-          <p:cNvSpPr txBox="1"/>
-          <p:nvPr/>
-        </p:nvSpPr>
-        <p:spPr>
-          <a:xfrm>
-            <a:off x="457200" y="4663440"/>
-            <a:ext cx="8229600" cy="320040"/>
-          </a:xfrm>
-          <a:prstGeom prst="rect">
-            <a:avLst/>
-          </a:prstGeom>
-          <a:noFill/>
-          <a:ln/>
-        </p:spPr>
-        <p:txBody>
-          <a:bodyPr wrap="square" lIns="0" tIns="0" rIns="0" bIns="0" rtlCol="0" anchor="ctr"/>
-          <a:lstStyle/>
-          <a:p>
-            <a:pPr indent="0" marL="0">
-              <a:buNone/>
-            </a:pPr>
-            <a:r>
-              <a:rPr lang="en-US" sz="800" dirty="0">
-                <a:solidFill>
-                  <a:schemeClr val="accent4"/>
-                </a:solidFill>
-              </a:rPr>
-              <a:t>来源：CNN (2000)；UPI (2000)；Fortune (2016)；NBC News (2017)；CHEManager (2022)；Retail Dive (2023)；MarketScreener (2025)；NJBIZ (2026)。</a:t>
-            </a:r>
-            <a:endParaRPr lang="en-US" sz="800" dirty="0"/>
+              <a:t>来源：University of Greenwich (2026); Christensen et al. (2011)</a:t>
+            </a:r>
+            <a:endParaRPr lang="en-US" sz="850" dirty="0"/>
           </a:p>
         </p:txBody>
       </p:sp>
@@ -2333,6 +2386,1263 @@
                   <a:schemeClr val="tx2"/>
                 </a:solidFill>
               </a:rPr>
+              <a:t>Unilever 的并购：从“买”到“卖”</a:t>
+            </a:r>
+            <a:endParaRPr lang="en-US" sz="2800" dirty="0"/>
+          </a:p>
+        </p:txBody>
+      </p:sp>
+      <p:sp>
+        <p:nvSpPr>
+          <p:cNvPr id="3" name="Text 1"/>
+          <p:cNvSpPr txBox="1"/>
+          <p:nvPr/>
+        </p:nvSpPr>
+        <p:spPr>
+          <a:xfrm>
+            <a:off x="457200" y="804672"/>
+            <a:ext cx="8229600" cy="274320"/>
+          </a:xfrm>
+          <a:prstGeom prst="rect">
+            <a:avLst/>
+          </a:prstGeom>
+          <a:noFill/>
+          <a:ln/>
+        </p:spPr>
+        <p:txBody>
+          <a:bodyPr wrap="square" lIns="0" tIns="0" rIns="0" bIns="0" rtlCol="0" anchor="ctr"/>
+          <a:lstStyle/>
+          <a:p>
+            <a:pPr indent="0" marL="0">
+              <a:buNone/>
+            </a:pPr>
+            <a:r>
+              <a:rPr lang="en-US" sz="1300" i="1" dirty="0">
+                <a:solidFill>
+                  <a:schemeClr val="tx1"/>
+                </a:solidFill>
+              </a:rPr>
+              <a:t>前二十年靠收购做大，近几年转向聚焦核心</a:t>
+            </a:r>
+            <a:endParaRPr lang="en-US" sz="1300" dirty="0"/>
+          </a:p>
+        </p:txBody>
+      </p:sp>
+      <p:sp>
+        <p:nvSpPr>
+          <p:cNvPr id="4" name="born"/>
+          <p:cNvSpPr/>
+          <p:nvPr/>
+        </p:nvSpPr>
+        <p:spPr>
+          <a:xfrm>
+            <a:off x="457200" y="1188720"/>
+            <a:ext cx="8229600" cy="347472"/>
+          </a:xfrm>
+          <a:prstGeom prst="roundRect">
+            <a:avLst>
+              <a:gd name="adj" fmla="val 21053"/>
+            </a:avLst>
+          </a:prstGeom>
+          <a:solidFill>
+            <a:schemeClr val="bg2"/>
+          </a:solidFill>
+          <a:ln/>
+        </p:spPr>
+      </p:sp>
+      <p:sp>
+        <p:nvSpPr>
+          <p:cNvPr id="5" name="Text 3"/>
+          <p:cNvSpPr txBox="1"/>
+          <p:nvPr/>
+        </p:nvSpPr>
+        <p:spPr>
+          <a:xfrm>
+            <a:off x="594360" y="1188720"/>
+            <a:ext cx="7955280" cy="347472"/>
+          </a:xfrm>
+          <a:prstGeom prst="rect">
+            <a:avLst/>
+          </a:prstGeom>
+          <a:noFill/>
+          <a:ln/>
+        </p:spPr>
+        <p:txBody>
+          <a:bodyPr wrap="square" lIns="0" tIns="0" rIns="0" bIns="0" rtlCol="0" anchor="ctr"/>
+          <a:lstStyle/>
+          <a:p>
+            <a:pPr indent="0" marL="0">
+              <a:buNone/>
+            </a:pPr>
+            <a:r>
+              <a:rPr lang="en-US" sz="1200" b="1" dirty="0">
+                <a:solidFill>
+                  <a:schemeClr val="tx1"/>
+                </a:solidFill>
+              </a:rPr>
+              <a:t>1929 · 本身就是一次合并：英国 Lever Brothers + 荷兰 Margarine Unie</a:t>
+            </a:r>
+            <a:endParaRPr lang="en-US" sz="1200" dirty="0"/>
+          </a:p>
+        </p:txBody>
+      </p:sp>
+      <p:sp>
+        <p:nvSpPr>
+          <p:cNvPr id="6" name="phase0"/>
+          <p:cNvSpPr/>
+          <p:nvPr/>
+        </p:nvSpPr>
+        <p:spPr>
+          <a:xfrm>
+            <a:off x="457200" y="1691640"/>
+            <a:ext cx="2606040" cy="566928"/>
+          </a:xfrm>
+          <a:prstGeom prst="roundRect">
+            <a:avLst>
+              <a:gd name="adj" fmla="val 12903"/>
+            </a:avLst>
+          </a:prstGeom>
+          <a:solidFill>
+            <a:schemeClr val="accent1"/>
+          </a:solidFill>
+          <a:ln/>
+        </p:spPr>
+      </p:sp>
+      <p:sp>
+        <p:nvSpPr>
+          <p:cNvPr id="7" name="Text 5"/>
+          <p:cNvSpPr txBox="1"/>
+          <p:nvPr/>
+        </p:nvSpPr>
+        <p:spPr>
+          <a:xfrm>
+            <a:off x="566928" y="1691640"/>
+            <a:ext cx="2386584" cy="566928"/>
+          </a:xfrm>
+          <a:prstGeom prst="rect">
+            <a:avLst/>
+          </a:prstGeom>
+          <a:noFill/>
+          <a:ln/>
+        </p:spPr>
+        <p:txBody>
+          <a:bodyPr wrap="square" lIns="0" tIns="0" rIns="0" bIns="0" rtlCol="0" anchor="ctr"/>
+          <a:lstStyle/>
+          <a:p>
+            <a:pPr indent="0" marL="0">
+              <a:buNone/>
+            </a:pPr>
+            <a:r>
+              <a:rPr lang="en-US" sz="1500" b="1" dirty="0">
+                <a:solidFill>
+                  <a:srgbClr val="FFFFFF"/>
+                </a:solidFill>
+              </a:rPr>
+              <a:t>买</a:t>
+            </a:r>
+            <a:endParaRPr lang="en-US" sz="1500" dirty="0"/>
+          </a:p>
+          <a:p>
+            <a:pPr indent="0" marL="0">
+              <a:buNone/>
+            </a:pPr>
+            <a:r>
+              <a:rPr lang="en-US" sz="1050" dirty="0">
+                <a:solidFill>
+                  <a:srgbClr val="FFFFFF"/>
+                </a:solidFill>
+              </a:rPr>
+              <a:t>做大规模、进入新市场</a:t>
+            </a:r>
+            <a:endParaRPr lang="en-US" sz="1500" dirty="0"/>
+          </a:p>
+        </p:txBody>
+      </p:sp>
+      <p:sp>
+        <p:nvSpPr>
+          <p:cNvPr id="8" name="yr00"/>
+          <p:cNvSpPr/>
+          <p:nvPr/>
+        </p:nvSpPr>
+        <p:spPr>
+          <a:xfrm>
+            <a:off x="457200" y="2414016"/>
+            <a:ext cx="475488" cy="475488"/>
+          </a:xfrm>
+          <a:prstGeom prst="ellipse">
+            <a:avLst/>
+          </a:prstGeom>
+          <a:solidFill>
+            <a:schemeClr val="accent1"/>
+          </a:solidFill>
+          <a:ln/>
+        </p:spPr>
+      </p:sp>
+      <p:sp>
+        <p:nvSpPr>
+          <p:cNvPr id="9" name="Text 7"/>
+          <p:cNvSpPr txBox="1"/>
+          <p:nvPr/>
+        </p:nvSpPr>
+        <p:spPr>
+          <a:xfrm>
+            <a:off x="457200" y="2414016"/>
+            <a:ext cx="475488" cy="475488"/>
+          </a:xfrm>
+          <a:prstGeom prst="rect">
+            <a:avLst/>
+          </a:prstGeom>
+          <a:noFill/>
+          <a:ln/>
+        </p:spPr>
+        <p:txBody>
+          <a:bodyPr wrap="square" lIns="0" tIns="0" rIns="0" bIns="0" rtlCol="0" anchor="ctr"/>
+          <a:lstStyle/>
+          <a:p>
+            <a:pPr algn="ctr" indent="0" marL="0">
+              <a:buNone/>
+            </a:pPr>
+            <a:r>
+              <a:rPr lang="en-US" sz="1000" b="1" dirty="0">
+                <a:solidFill>
+                  <a:srgbClr val="FFFFFF"/>
+                </a:solidFill>
+              </a:rPr>
+              <a:t>2000</a:t>
+            </a:r>
+            <a:endParaRPr lang="en-US" sz="1000" dirty="0"/>
+          </a:p>
+        </p:txBody>
+      </p:sp>
+      <p:sp>
+        <p:nvSpPr>
+          <p:cNvPr id="10" name="Text 8"/>
+          <p:cNvSpPr txBox="1"/>
+          <p:nvPr/>
+        </p:nvSpPr>
+        <p:spPr>
+          <a:xfrm>
+            <a:off x="1005840" y="2377440"/>
+            <a:ext cx="2057400" cy="603504"/>
+          </a:xfrm>
+          <a:prstGeom prst="rect">
+            <a:avLst/>
+          </a:prstGeom>
+          <a:noFill/>
+          <a:ln/>
+        </p:spPr>
+        <p:txBody>
+          <a:bodyPr wrap="square" lIns="0" tIns="0" rIns="0" bIns="0" rtlCol="0" anchor="t"/>
+          <a:lstStyle/>
+          <a:p>
+            <a:pPr indent="0" marL="0">
+              <a:buNone/>
+            </a:pPr>
+            <a:r>
+              <a:rPr lang="en-US" sz="1250" b="1" dirty="0">
+                <a:solidFill>
+                  <a:schemeClr val="tx1"/>
+                </a:solidFill>
+              </a:rPr>
+              <a:t>Bestfoods</a:t>
+            </a:r>
+            <a:endParaRPr lang="en-US" sz="1250" dirty="0"/>
+          </a:p>
+          <a:p>
+            <a:pPr indent="0" marL="0">
+              <a:buNone/>
+            </a:pPr>
+            <a:r>
+              <a:rPr lang="en-US" sz="1050" dirty="0">
+                <a:solidFill>
+                  <a:schemeClr val="accent4"/>
+                </a:solidFill>
+              </a:rPr>
+              <a:t>243 亿美元 · Knorr、Hellmann's</a:t>
+            </a:r>
+            <a:endParaRPr lang="en-US" sz="1250" dirty="0"/>
+          </a:p>
+        </p:txBody>
+      </p:sp>
+      <p:sp>
+        <p:nvSpPr>
+          <p:cNvPr id="11" name="yr01"/>
+          <p:cNvSpPr/>
+          <p:nvPr/>
+        </p:nvSpPr>
+        <p:spPr>
+          <a:xfrm>
+            <a:off x="457200" y="3127248"/>
+            <a:ext cx="475488" cy="475488"/>
+          </a:xfrm>
+          <a:prstGeom prst="ellipse">
+            <a:avLst/>
+          </a:prstGeom>
+          <a:solidFill>
+            <a:schemeClr val="accent1"/>
+          </a:solidFill>
+          <a:ln/>
+        </p:spPr>
+      </p:sp>
+      <p:sp>
+        <p:nvSpPr>
+          <p:cNvPr id="12" name="Text 10"/>
+          <p:cNvSpPr txBox="1"/>
+          <p:nvPr/>
+        </p:nvSpPr>
+        <p:spPr>
+          <a:xfrm>
+            <a:off x="457200" y="3127248"/>
+            <a:ext cx="475488" cy="475488"/>
+          </a:xfrm>
+          <a:prstGeom prst="rect">
+            <a:avLst/>
+          </a:prstGeom>
+          <a:noFill/>
+          <a:ln/>
+        </p:spPr>
+        <p:txBody>
+          <a:bodyPr wrap="square" lIns="0" tIns="0" rIns="0" bIns="0" rtlCol="0" anchor="ctr"/>
+          <a:lstStyle/>
+          <a:p>
+            <a:pPr algn="ctr" indent="0" marL="0">
+              <a:buNone/>
+            </a:pPr>
+            <a:r>
+              <a:rPr lang="en-US" sz="1000" b="1" dirty="0">
+                <a:solidFill>
+                  <a:srgbClr val="FFFFFF"/>
+                </a:solidFill>
+              </a:rPr>
+              <a:t>2000</a:t>
+            </a:r>
+            <a:endParaRPr lang="en-US" sz="1000" dirty="0"/>
+          </a:p>
+        </p:txBody>
+      </p:sp>
+      <p:sp>
+        <p:nvSpPr>
+          <p:cNvPr id="13" name="Text 11"/>
+          <p:cNvSpPr txBox="1"/>
+          <p:nvPr/>
+        </p:nvSpPr>
+        <p:spPr>
+          <a:xfrm>
+            <a:off x="1005840" y="3090672"/>
+            <a:ext cx="2057400" cy="603504"/>
+          </a:xfrm>
+          <a:prstGeom prst="rect">
+            <a:avLst/>
+          </a:prstGeom>
+          <a:noFill/>
+          <a:ln/>
+        </p:spPr>
+        <p:txBody>
+          <a:bodyPr wrap="square" lIns="0" tIns="0" rIns="0" bIns="0" rtlCol="0" anchor="t"/>
+          <a:lstStyle/>
+          <a:p>
+            <a:pPr indent="0" marL="0">
+              <a:buNone/>
+            </a:pPr>
+            <a:r>
+              <a:rPr lang="en-US" sz="1250" b="1" dirty="0">
+                <a:solidFill>
+                  <a:schemeClr val="tx1"/>
+                </a:solidFill>
+              </a:rPr>
+              <a:t>Ben &amp; Jerry's</a:t>
+            </a:r>
+            <a:endParaRPr lang="en-US" sz="1250" dirty="0"/>
+          </a:p>
+          <a:p>
+            <a:pPr indent="0" marL="0">
+              <a:buNone/>
+            </a:pPr>
+            <a:r>
+              <a:rPr lang="en-US" sz="1050" dirty="0">
+                <a:solidFill>
+                  <a:schemeClr val="accent4"/>
+                </a:solidFill>
+              </a:rPr>
+              <a:t>3.26 亿美元 · 独立运营，保留董事会</a:t>
+            </a:r>
+            <a:endParaRPr lang="en-US" sz="1250" dirty="0"/>
+          </a:p>
+        </p:txBody>
+      </p:sp>
+      <p:sp>
+        <p:nvSpPr>
+          <p:cNvPr id="14" name="yr02"/>
+          <p:cNvSpPr/>
+          <p:nvPr/>
+        </p:nvSpPr>
+        <p:spPr>
+          <a:xfrm>
+            <a:off x="457200" y="3840480"/>
+            <a:ext cx="475488" cy="475488"/>
+          </a:xfrm>
+          <a:prstGeom prst="ellipse">
+            <a:avLst/>
+          </a:prstGeom>
+          <a:solidFill>
+            <a:schemeClr val="accent1"/>
+          </a:solidFill>
+          <a:ln/>
+        </p:spPr>
+      </p:sp>
+      <p:sp>
+        <p:nvSpPr>
+          <p:cNvPr id="15" name="Text 13"/>
+          <p:cNvSpPr txBox="1"/>
+          <p:nvPr/>
+        </p:nvSpPr>
+        <p:spPr>
+          <a:xfrm>
+            <a:off x="457200" y="3840480"/>
+            <a:ext cx="475488" cy="475488"/>
+          </a:xfrm>
+          <a:prstGeom prst="rect">
+            <a:avLst/>
+          </a:prstGeom>
+          <a:noFill/>
+          <a:ln/>
+        </p:spPr>
+        <p:txBody>
+          <a:bodyPr wrap="square" lIns="0" tIns="0" rIns="0" bIns="0" rtlCol="0" anchor="ctr"/>
+          <a:lstStyle/>
+          <a:p>
+            <a:pPr algn="ctr" indent="0" marL="0">
+              <a:buNone/>
+            </a:pPr>
+            <a:r>
+              <a:rPr lang="en-US" sz="1000" b="1" dirty="0">
+                <a:solidFill>
+                  <a:srgbClr val="FFFFFF"/>
+                </a:solidFill>
+              </a:rPr>
+              <a:t>2016</a:t>
+            </a:r>
+            <a:endParaRPr lang="en-US" sz="1000" dirty="0"/>
+          </a:p>
+        </p:txBody>
+      </p:sp>
+      <p:sp>
+        <p:nvSpPr>
+          <p:cNvPr id="16" name="Text 14"/>
+          <p:cNvSpPr txBox="1"/>
+          <p:nvPr/>
+        </p:nvSpPr>
+        <p:spPr>
+          <a:xfrm>
+            <a:off x="1005840" y="3803904"/>
+            <a:ext cx="2057400" cy="603504"/>
+          </a:xfrm>
+          <a:prstGeom prst="rect">
+            <a:avLst/>
+          </a:prstGeom>
+          <a:noFill/>
+          <a:ln/>
+        </p:spPr>
+        <p:txBody>
+          <a:bodyPr wrap="square" lIns="0" tIns="0" rIns="0" bIns="0" rtlCol="0" anchor="t"/>
+          <a:lstStyle/>
+          <a:p>
+            <a:pPr indent="0" marL="0">
+              <a:buNone/>
+            </a:pPr>
+            <a:r>
+              <a:rPr lang="en-US" sz="1250" b="1" dirty="0">
+                <a:solidFill>
+                  <a:schemeClr val="tx1"/>
+                </a:solidFill>
+              </a:rPr>
+              <a:t>Dollar Shave Club</a:t>
+            </a:r>
+            <a:endParaRPr lang="en-US" sz="1250" dirty="0"/>
+          </a:p>
+          <a:p>
+            <a:pPr indent="0" marL="0">
+              <a:buNone/>
+            </a:pPr>
+            <a:r>
+              <a:rPr lang="en-US" sz="1050" dirty="0">
+                <a:solidFill>
+                  <a:schemeClr val="accent4"/>
+                </a:solidFill>
+              </a:rPr>
+              <a:t>约 10 亿美元 · 网上直销</a:t>
+            </a:r>
+            <a:endParaRPr lang="en-US" sz="1250" dirty="0"/>
+          </a:p>
+        </p:txBody>
+      </p:sp>
+      <p:sp>
+        <p:nvSpPr>
+          <p:cNvPr id="17" name="phase1"/>
+          <p:cNvSpPr/>
+          <p:nvPr/>
+        </p:nvSpPr>
+        <p:spPr>
+          <a:xfrm>
+            <a:off x="3268980" y="1691640"/>
+            <a:ext cx="2606040" cy="566928"/>
+          </a:xfrm>
+          <a:prstGeom prst="roundRect">
+            <a:avLst>
+              <a:gd name="adj" fmla="val 12903"/>
+            </a:avLst>
+          </a:prstGeom>
+          <a:solidFill>
+            <a:schemeClr val="accent3"/>
+          </a:solidFill>
+          <a:ln/>
+        </p:spPr>
+      </p:sp>
+      <p:sp>
+        <p:nvSpPr>
+          <p:cNvPr id="18" name="Text 16"/>
+          <p:cNvSpPr txBox="1"/>
+          <p:nvPr/>
+        </p:nvSpPr>
+        <p:spPr>
+          <a:xfrm>
+            <a:off x="3378708" y="1691640"/>
+            <a:ext cx="2386584" cy="566928"/>
+          </a:xfrm>
+          <a:prstGeom prst="rect">
+            <a:avLst/>
+          </a:prstGeom>
+          <a:noFill/>
+          <a:ln/>
+        </p:spPr>
+        <p:txBody>
+          <a:bodyPr wrap="square" lIns="0" tIns="0" rIns="0" bIns="0" rtlCol="0" anchor="ctr"/>
+          <a:lstStyle/>
+          <a:p>
+            <a:pPr indent="0" marL="0">
+              <a:buNone/>
+            </a:pPr>
+            <a:r>
+              <a:rPr lang="en-US" sz="1500" b="1" dirty="0">
+                <a:solidFill>
+                  <a:srgbClr val="FFFFFF"/>
+                </a:solidFill>
+              </a:rPr>
+              <a:t>转折</a:t>
+            </a:r>
+            <a:endParaRPr lang="en-US" sz="1500" dirty="0"/>
+          </a:p>
+          <a:p>
+            <a:pPr indent="0" marL="0">
+              <a:buNone/>
+            </a:pPr>
+            <a:r>
+              <a:rPr lang="en-US" sz="1050" dirty="0">
+                <a:solidFill>
+                  <a:srgbClr val="FFFFFF"/>
+                </a:solidFill>
+              </a:rPr>
+              <a:t>来自收购方和投资者的压力</a:t>
+            </a:r>
+            <a:endParaRPr lang="en-US" sz="1500" dirty="0"/>
+          </a:p>
+        </p:txBody>
+      </p:sp>
+      <p:sp>
+        <p:nvSpPr>
+          <p:cNvPr id="19" name="yr10"/>
+          <p:cNvSpPr/>
+          <p:nvPr/>
+        </p:nvSpPr>
+        <p:spPr>
+          <a:xfrm>
+            <a:off x="3268980" y="2414016"/>
+            <a:ext cx="475488" cy="475488"/>
+          </a:xfrm>
+          <a:prstGeom prst="ellipse">
+            <a:avLst/>
+          </a:prstGeom>
+          <a:solidFill>
+            <a:schemeClr val="accent3"/>
+          </a:solidFill>
+          <a:ln/>
+        </p:spPr>
+      </p:sp>
+      <p:sp>
+        <p:nvSpPr>
+          <p:cNvPr id="20" name="Text 18"/>
+          <p:cNvSpPr txBox="1"/>
+          <p:nvPr/>
+        </p:nvSpPr>
+        <p:spPr>
+          <a:xfrm>
+            <a:off x="3268980" y="2414016"/>
+            <a:ext cx="475488" cy="475488"/>
+          </a:xfrm>
+          <a:prstGeom prst="rect">
+            <a:avLst/>
+          </a:prstGeom>
+          <a:noFill/>
+          <a:ln/>
+        </p:spPr>
+        <p:txBody>
+          <a:bodyPr wrap="square" lIns="0" tIns="0" rIns="0" bIns="0" rtlCol="0" anchor="ctr"/>
+          <a:lstStyle/>
+          <a:p>
+            <a:pPr algn="ctr" indent="0" marL="0">
+              <a:buNone/>
+            </a:pPr>
+            <a:r>
+              <a:rPr lang="en-US" sz="1000" b="1" dirty="0">
+                <a:solidFill>
+                  <a:srgbClr val="FFFFFF"/>
+                </a:solidFill>
+              </a:rPr>
+              <a:t>2017</a:t>
+            </a:r>
+            <a:endParaRPr lang="en-US" sz="1000" dirty="0"/>
+          </a:p>
+        </p:txBody>
+      </p:sp>
+      <p:sp>
+        <p:nvSpPr>
+          <p:cNvPr id="21" name="Text 19"/>
+          <p:cNvSpPr txBox="1"/>
+          <p:nvPr/>
+        </p:nvSpPr>
+        <p:spPr>
+          <a:xfrm>
+            <a:off x="3817620" y="2377440"/>
+            <a:ext cx="2057400" cy="603504"/>
+          </a:xfrm>
+          <a:prstGeom prst="rect">
+            <a:avLst/>
+          </a:prstGeom>
+          <a:noFill/>
+          <a:ln/>
+        </p:spPr>
+        <p:txBody>
+          <a:bodyPr wrap="square" lIns="0" tIns="0" rIns="0" bIns="0" rtlCol="0" anchor="t"/>
+          <a:lstStyle/>
+          <a:p>
+            <a:pPr indent="0" marL="0">
+              <a:buNone/>
+            </a:pPr>
+            <a:r>
+              <a:rPr lang="en-US" sz="1250" b="1" dirty="0">
+                <a:solidFill>
+                  <a:schemeClr val="tx1"/>
+                </a:solidFill>
+              </a:rPr>
+              <a:t>Kraft Heinz 收购</a:t>
+            </a:r>
+            <a:endParaRPr lang="en-US" sz="1250" dirty="0"/>
+          </a:p>
+          <a:p>
+            <a:pPr indent="0" marL="0">
+              <a:buNone/>
+            </a:pPr>
+            <a:r>
+              <a:rPr lang="en-US" sz="1050" dirty="0">
+                <a:solidFill>
+                  <a:schemeClr val="accent4"/>
+                </a:solidFill>
+              </a:rPr>
+              <a:t>1,430 亿美元报价被拒，随后撤回</a:t>
+            </a:r>
+            <a:endParaRPr lang="en-US" sz="1250" dirty="0"/>
+          </a:p>
+        </p:txBody>
+      </p:sp>
+      <p:sp>
+        <p:nvSpPr>
+          <p:cNvPr id="22" name="yr11"/>
+          <p:cNvSpPr/>
+          <p:nvPr/>
+        </p:nvSpPr>
+        <p:spPr>
+          <a:xfrm>
+            <a:off x="3268980" y="3127248"/>
+            <a:ext cx="475488" cy="475488"/>
+          </a:xfrm>
+          <a:prstGeom prst="ellipse">
+            <a:avLst/>
+          </a:prstGeom>
+          <a:solidFill>
+            <a:schemeClr val="accent3"/>
+          </a:solidFill>
+          <a:ln/>
+        </p:spPr>
+      </p:sp>
+      <p:sp>
+        <p:nvSpPr>
+          <p:cNvPr id="23" name="Text 21"/>
+          <p:cNvSpPr txBox="1"/>
+          <p:nvPr/>
+        </p:nvSpPr>
+        <p:spPr>
+          <a:xfrm>
+            <a:off x="3268980" y="3127248"/>
+            <a:ext cx="475488" cy="475488"/>
+          </a:xfrm>
+          <a:prstGeom prst="rect">
+            <a:avLst/>
+          </a:prstGeom>
+          <a:noFill/>
+          <a:ln/>
+        </p:spPr>
+        <p:txBody>
+          <a:bodyPr wrap="square" lIns="0" tIns="0" rIns="0" bIns="0" rtlCol="0" anchor="ctr"/>
+          <a:lstStyle/>
+          <a:p>
+            <a:pPr algn="ctr" indent="0" marL="0">
+              <a:buNone/>
+            </a:pPr>
+            <a:r>
+              <a:rPr lang="en-US" sz="1000" b="1" dirty="0">
+                <a:solidFill>
+                  <a:srgbClr val="FFFFFF"/>
+                </a:solidFill>
+              </a:rPr>
+              <a:t>2022</a:t>
+            </a:r>
+            <a:endParaRPr lang="en-US" sz="1000" dirty="0"/>
+          </a:p>
+        </p:txBody>
+      </p:sp>
+      <p:sp>
+        <p:nvSpPr>
+          <p:cNvPr id="24" name="Text 22"/>
+          <p:cNvSpPr txBox="1"/>
+          <p:nvPr/>
+        </p:nvSpPr>
+        <p:spPr>
+          <a:xfrm>
+            <a:off x="3817620" y="3090672"/>
+            <a:ext cx="2057400" cy="603504"/>
+          </a:xfrm>
+          <a:prstGeom prst="rect">
+            <a:avLst/>
+          </a:prstGeom>
+          <a:noFill/>
+          <a:ln/>
+        </p:spPr>
+        <p:txBody>
+          <a:bodyPr wrap="square" lIns="0" tIns="0" rIns="0" bIns="0" rtlCol="0" anchor="t"/>
+          <a:lstStyle/>
+          <a:p>
+            <a:pPr indent="0" marL="0">
+              <a:buNone/>
+            </a:pPr>
+            <a:r>
+              <a:rPr lang="en-US" sz="1250" b="1" dirty="0">
+                <a:solidFill>
+                  <a:schemeClr val="tx1"/>
+                </a:solidFill>
+              </a:rPr>
+              <a:t>GSK 消费者健康</a:t>
+            </a:r>
+            <a:endParaRPr lang="en-US" sz="1250" dirty="0"/>
+          </a:p>
+          <a:p>
+            <a:pPr indent="0" marL="0">
+              <a:buNone/>
+            </a:pPr>
+            <a:r>
+              <a:rPr lang="en-US" sz="1050" dirty="0">
+                <a:solidFill>
+                  <a:schemeClr val="accent4"/>
+                </a:solidFill>
+              </a:rPr>
+              <a:t>500 亿英镑出价，股东反对后放弃</a:t>
+            </a:r>
+            <a:endParaRPr lang="en-US" sz="1250" dirty="0"/>
+          </a:p>
+        </p:txBody>
+      </p:sp>
+      <p:sp>
+        <p:nvSpPr>
+          <p:cNvPr id="25" name="phase2"/>
+          <p:cNvSpPr/>
+          <p:nvPr/>
+        </p:nvSpPr>
+        <p:spPr>
+          <a:xfrm>
+            <a:off x="6080760" y="1691640"/>
+            <a:ext cx="2606040" cy="566928"/>
+          </a:xfrm>
+          <a:prstGeom prst="roundRect">
+            <a:avLst>
+              <a:gd name="adj" fmla="val 12903"/>
+            </a:avLst>
+          </a:prstGeom>
+          <a:solidFill>
+            <a:schemeClr val="accent2"/>
+          </a:solidFill>
+          <a:ln/>
+        </p:spPr>
+      </p:sp>
+      <p:sp>
+        <p:nvSpPr>
+          <p:cNvPr id="26" name="Text 24"/>
+          <p:cNvSpPr txBox="1"/>
+          <p:nvPr/>
+        </p:nvSpPr>
+        <p:spPr>
+          <a:xfrm>
+            <a:off x="6190488" y="1691640"/>
+            <a:ext cx="2386584" cy="566928"/>
+          </a:xfrm>
+          <a:prstGeom prst="rect">
+            <a:avLst/>
+          </a:prstGeom>
+          <a:noFill/>
+          <a:ln/>
+        </p:spPr>
+        <p:txBody>
+          <a:bodyPr wrap="square" lIns="0" tIns="0" rIns="0" bIns="0" rtlCol="0" anchor="ctr"/>
+          <a:lstStyle/>
+          <a:p>
+            <a:pPr indent="0" marL="0">
+              <a:buNone/>
+            </a:pPr>
+            <a:r>
+              <a:rPr lang="en-US" sz="1500" b="1" dirty="0">
+                <a:solidFill>
+                  <a:srgbClr val="FFFFFF"/>
+                </a:solidFill>
+              </a:rPr>
+              <a:t>卖</a:t>
+            </a:r>
+            <a:endParaRPr lang="en-US" sz="1500" dirty="0"/>
+          </a:p>
+          <a:p>
+            <a:pPr indent="0" marL="0">
+              <a:buNone/>
+            </a:pPr>
+            <a:r>
+              <a:rPr lang="en-US" sz="1050" dirty="0">
+                <a:solidFill>
+                  <a:srgbClr val="FFFFFF"/>
+                </a:solidFill>
+              </a:rPr>
+              <a:t>简化业务、聚焦核心</a:t>
+            </a:r>
+            <a:endParaRPr lang="en-US" sz="1500" dirty="0"/>
+          </a:p>
+        </p:txBody>
+      </p:sp>
+      <p:sp>
+        <p:nvSpPr>
+          <p:cNvPr id="27" name="yr20"/>
+          <p:cNvSpPr/>
+          <p:nvPr/>
+        </p:nvSpPr>
+        <p:spPr>
+          <a:xfrm>
+            <a:off x="6080760" y="2414016"/>
+            <a:ext cx="475488" cy="475488"/>
+          </a:xfrm>
+          <a:prstGeom prst="ellipse">
+            <a:avLst/>
+          </a:prstGeom>
+          <a:solidFill>
+            <a:schemeClr val="accent2"/>
+          </a:solidFill>
+          <a:ln/>
+        </p:spPr>
+      </p:sp>
+      <p:sp>
+        <p:nvSpPr>
+          <p:cNvPr id="28" name="Text 26"/>
+          <p:cNvSpPr txBox="1"/>
+          <p:nvPr/>
+        </p:nvSpPr>
+        <p:spPr>
+          <a:xfrm>
+            <a:off x="6080760" y="2414016"/>
+            <a:ext cx="475488" cy="475488"/>
+          </a:xfrm>
+          <a:prstGeom prst="rect">
+            <a:avLst/>
+          </a:prstGeom>
+          <a:noFill/>
+          <a:ln/>
+        </p:spPr>
+        <p:txBody>
+          <a:bodyPr wrap="square" lIns="0" tIns="0" rIns="0" bIns="0" rtlCol="0" anchor="ctr"/>
+          <a:lstStyle/>
+          <a:p>
+            <a:pPr algn="ctr" indent="0" marL="0">
+              <a:buNone/>
+            </a:pPr>
+            <a:r>
+              <a:rPr lang="en-US" sz="1000" b="1" dirty="0">
+                <a:solidFill>
+                  <a:srgbClr val="FFFFFF"/>
+                </a:solidFill>
+              </a:rPr>
+              <a:t>2023</a:t>
+            </a:r>
+            <a:endParaRPr lang="en-US" sz="1000" dirty="0"/>
+          </a:p>
+        </p:txBody>
+      </p:sp>
+      <p:sp>
+        <p:nvSpPr>
+          <p:cNvPr id="29" name="Text 27"/>
+          <p:cNvSpPr txBox="1"/>
+          <p:nvPr/>
+        </p:nvSpPr>
+        <p:spPr>
+          <a:xfrm>
+            <a:off x="6629400" y="2377440"/>
+            <a:ext cx="2057400" cy="603504"/>
+          </a:xfrm>
+          <a:prstGeom prst="rect">
+            <a:avLst/>
+          </a:prstGeom>
+          <a:noFill/>
+          <a:ln/>
+        </p:spPr>
+        <p:txBody>
+          <a:bodyPr wrap="square" lIns="0" tIns="0" rIns="0" bIns="0" rtlCol="0" anchor="t"/>
+          <a:lstStyle/>
+          <a:p>
+            <a:pPr indent="0" marL="0">
+              <a:buNone/>
+            </a:pPr>
+            <a:r>
+              <a:rPr lang="en-US" sz="1250" b="1" dirty="0">
+                <a:solidFill>
+                  <a:schemeClr val="tx1"/>
+                </a:solidFill>
+              </a:rPr>
+              <a:t>Dollar Shave Club</a:t>
+            </a:r>
+            <a:endParaRPr lang="en-US" sz="1250" dirty="0"/>
+          </a:p>
+          <a:p>
+            <a:pPr indent="0" marL="0">
+              <a:buNone/>
+            </a:pPr>
+            <a:r>
+              <a:rPr lang="en-US" sz="1050" dirty="0">
+                <a:solidFill>
+                  <a:schemeClr val="accent4"/>
+                </a:solidFill>
+              </a:rPr>
+              <a:t>卖出多数股权</a:t>
+            </a:r>
+            <a:endParaRPr lang="en-US" sz="1250" dirty="0"/>
+          </a:p>
+        </p:txBody>
+      </p:sp>
+      <p:sp>
+        <p:nvSpPr>
+          <p:cNvPr id="30" name="yr21"/>
+          <p:cNvSpPr/>
+          <p:nvPr/>
+        </p:nvSpPr>
+        <p:spPr>
+          <a:xfrm>
+            <a:off x="6080760" y="3127248"/>
+            <a:ext cx="475488" cy="475488"/>
+          </a:xfrm>
+          <a:prstGeom prst="ellipse">
+            <a:avLst/>
+          </a:prstGeom>
+          <a:solidFill>
+            <a:schemeClr val="accent2"/>
+          </a:solidFill>
+          <a:ln/>
+        </p:spPr>
+      </p:sp>
+      <p:sp>
+        <p:nvSpPr>
+          <p:cNvPr id="31" name="Text 29"/>
+          <p:cNvSpPr txBox="1"/>
+          <p:nvPr/>
+        </p:nvSpPr>
+        <p:spPr>
+          <a:xfrm>
+            <a:off x="6080760" y="3127248"/>
+            <a:ext cx="475488" cy="475488"/>
+          </a:xfrm>
+          <a:prstGeom prst="rect">
+            <a:avLst/>
+          </a:prstGeom>
+          <a:noFill/>
+          <a:ln/>
+        </p:spPr>
+        <p:txBody>
+          <a:bodyPr wrap="square" lIns="0" tIns="0" rIns="0" bIns="0" rtlCol="0" anchor="ctr"/>
+          <a:lstStyle/>
+          <a:p>
+            <a:pPr algn="ctr" indent="0" marL="0">
+              <a:buNone/>
+            </a:pPr>
+            <a:r>
+              <a:rPr lang="en-US" sz="1000" b="1" dirty="0">
+                <a:solidFill>
+                  <a:srgbClr val="FFFFFF"/>
+                </a:solidFill>
+              </a:rPr>
+              <a:t>2025</a:t>
+            </a:r>
+            <a:endParaRPr lang="en-US" sz="1000" dirty="0"/>
+          </a:p>
+        </p:txBody>
+      </p:sp>
+      <p:sp>
+        <p:nvSpPr>
+          <p:cNvPr id="32" name="Text 30"/>
+          <p:cNvSpPr txBox="1"/>
+          <p:nvPr/>
+        </p:nvSpPr>
+        <p:spPr>
+          <a:xfrm>
+            <a:off x="6629400" y="3090672"/>
+            <a:ext cx="2057400" cy="603504"/>
+          </a:xfrm>
+          <a:prstGeom prst="rect">
+            <a:avLst/>
+          </a:prstGeom>
+          <a:noFill/>
+          <a:ln/>
+        </p:spPr>
+        <p:txBody>
+          <a:bodyPr wrap="square" lIns="0" tIns="0" rIns="0" bIns="0" rtlCol="0" anchor="t"/>
+          <a:lstStyle/>
+          <a:p>
+            <a:pPr indent="0" marL="0">
+              <a:buNone/>
+            </a:pPr>
+            <a:r>
+              <a:rPr lang="en-US" sz="1250" b="1" dirty="0">
+                <a:solidFill>
+                  <a:schemeClr val="tx1"/>
+                </a:solidFill>
+              </a:rPr>
+              <a:t>冰淇淋 → Magnum</a:t>
+            </a:r>
+            <a:endParaRPr lang="en-US" sz="1250" dirty="0"/>
+          </a:p>
+          <a:p>
+            <a:pPr indent="0" marL="0">
+              <a:buNone/>
+            </a:pPr>
+            <a:r>
+              <a:rPr lang="en-US" sz="1050" dirty="0">
+                <a:solidFill>
+                  <a:schemeClr val="accent4"/>
+                </a:solidFill>
+              </a:rPr>
+              <a:t>分拆并独立上市</a:t>
+            </a:r>
+            <a:endParaRPr lang="en-US" sz="1250" dirty="0"/>
+          </a:p>
+        </p:txBody>
+      </p:sp>
+      <p:sp>
+        <p:nvSpPr>
+          <p:cNvPr id="33" name="yr22"/>
+          <p:cNvSpPr/>
+          <p:nvPr/>
+        </p:nvSpPr>
+        <p:spPr>
+          <a:xfrm>
+            <a:off x="6080760" y="3840480"/>
+            <a:ext cx="475488" cy="475488"/>
+          </a:xfrm>
+          <a:prstGeom prst="ellipse">
+            <a:avLst/>
+          </a:prstGeom>
+          <a:solidFill>
+            <a:schemeClr val="accent2"/>
+          </a:solidFill>
+          <a:ln/>
+        </p:spPr>
+      </p:sp>
+      <p:sp>
+        <p:nvSpPr>
+          <p:cNvPr id="34" name="Text 32"/>
+          <p:cNvSpPr txBox="1"/>
+          <p:nvPr/>
+        </p:nvSpPr>
+        <p:spPr>
+          <a:xfrm>
+            <a:off x="6080760" y="3840480"/>
+            <a:ext cx="475488" cy="475488"/>
+          </a:xfrm>
+          <a:prstGeom prst="rect">
+            <a:avLst/>
+          </a:prstGeom>
+          <a:noFill/>
+          <a:ln/>
+        </p:spPr>
+        <p:txBody>
+          <a:bodyPr wrap="square" lIns="0" tIns="0" rIns="0" bIns="0" rtlCol="0" anchor="ctr"/>
+          <a:lstStyle/>
+          <a:p>
+            <a:pPr algn="ctr" indent="0" marL="0">
+              <a:buNone/>
+            </a:pPr>
+            <a:r>
+              <a:rPr lang="en-US" sz="1000" b="1" dirty="0">
+                <a:solidFill>
+                  <a:srgbClr val="FFFFFF"/>
+                </a:solidFill>
+              </a:rPr>
+              <a:t>2026</a:t>
+            </a:r>
+            <a:endParaRPr lang="en-US" sz="1000" dirty="0"/>
+          </a:p>
+        </p:txBody>
+      </p:sp>
+      <p:sp>
+        <p:nvSpPr>
+          <p:cNvPr id="35" name="Text 33"/>
+          <p:cNvSpPr txBox="1"/>
+          <p:nvPr/>
+        </p:nvSpPr>
+        <p:spPr>
+          <a:xfrm>
+            <a:off x="6629400" y="3803904"/>
+            <a:ext cx="2057400" cy="603504"/>
+          </a:xfrm>
+          <a:prstGeom prst="rect">
+            <a:avLst/>
+          </a:prstGeom>
+          <a:noFill/>
+          <a:ln/>
+        </p:spPr>
+        <p:txBody>
+          <a:bodyPr wrap="square" lIns="0" tIns="0" rIns="0" bIns="0" rtlCol="0" anchor="t"/>
+          <a:lstStyle/>
+          <a:p>
+            <a:pPr indent="0" marL="0">
+              <a:buNone/>
+            </a:pPr>
+            <a:r>
+              <a:rPr lang="en-US" sz="1250" b="1" dirty="0">
+                <a:solidFill>
+                  <a:schemeClr val="tx1"/>
+                </a:solidFill>
+              </a:rPr>
+              <a:t>食品 → McCormick</a:t>
+            </a:r>
+            <a:endParaRPr lang="en-US" sz="1250" dirty="0"/>
+          </a:p>
+          <a:p>
+            <a:pPr indent="0" marL="0">
+              <a:buNone/>
+            </a:pPr>
+            <a:r>
+              <a:rPr lang="en-US" sz="1050" dirty="0">
+                <a:solidFill>
+                  <a:schemeClr val="accent4"/>
+                </a:solidFill>
+              </a:rPr>
+              <a:t>448 亿美元，已宣布，预计 2027 年完成</a:t>
+            </a:r>
+            <a:endParaRPr lang="en-US" sz="1250" dirty="0"/>
+          </a:p>
+        </p:txBody>
+      </p:sp>
+      <p:sp>
+        <p:nvSpPr>
+          <p:cNvPr id="36" name="Text 34"/>
+          <p:cNvSpPr txBox="1"/>
+          <p:nvPr/>
+        </p:nvSpPr>
+        <p:spPr>
+          <a:xfrm>
+            <a:off x="457200" y="4663440"/>
+            <a:ext cx="8229600" cy="320040"/>
+          </a:xfrm>
+          <a:prstGeom prst="rect">
+            <a:avLst/>
+          </a:prstGeom>
+          <a:noFill/>
+          <a:ln/>
+        </p:spPr>
+        <p:txBody>
+          <a:bodyPr wrap="square" lIns="0" tIns="0" rIns="0" bIns="0" rtlCol="0" anchor="ctr"/>
+          <a:lstStyle/>
+          <a:p>
+            <a:pPr indent="0" marL="0">
+              <a:buNone/>
+            </a:pPr>
+            <a:r>
+              <a:rPr lang="en-US" sz="800" dirty="0">
+                <a:solidFill>
+                  <a:schemeClr val="accent4"/>
+                </a:solidFill>
+              </a:rPr>
+              <a:t>来源：Encyclopedia.com (n.d.); CNNfn (2000); UPI (2000); Primack (2016); Associated Press (2017); Williams (2022); James (2023); Reuters (2025); Redmond (2026)</a:t>
+            </a:r>
+            <a:endParaRPr lang="en-US" sz="800" dirty="0"/>
+          </a:p>
+        </p:txBody>
+      </p:sp>
+    </p:spTree>
+  </p:cSld>
+  <p:clrMapOvr>
+    <a:masterClrMapping/>
+  </p:clrMapOvr>
+</p:sld>
+</file>
+
+<file path=ppt/slides/slide3.xml><?xml version="1.0" encoding="utf-8"?>
+<p:sld xmlns:a="http://schemas.openxmlformats.org/drawingml/2006/main" xmlns:r="http://schemas.openxmlformats.org/officeDocument/2006/relationships" xmlns:p="http://schemas.openxmlformats.org/presentationml/2006/main">
+  <p:cSld name="Slide 3">
+    <p:spTree>
+      <p:nvGrpSpPr>
+        <p:cNvPr id="1" name=""/>
+        <p:cNvGrpSpPr/>
+        <p:nvPr/>
+      </p:nvGrpSpPr>
+      <p:grpSpPr>
+        <a:xfrm>
+          <a:off x="0" y="0"/>
+          <a:ext cx="0" cy="0"/>
+          <a:chOff x="0" y="0"/>
+          <a:chExt cx="0" cy="0"/>
+        </a:xfrm>
+      </p:grpSpPr>
+      <p:sp>
+        <p:nvSpPr>
+          <p:cNvPr id="2" name="Text 0"/>
+          <p:cNvSpPr/>
+          <p:nvPr>
+            <p:ph idx="100" type="title" hasCustomPrompt="1"/>
+          </p:nvPr>
+        </p:nvSpPr>
+        <p:spPr>
+          <a:xfrm>
+            <a:off x="457200" y="274320"/>
+            <a:ext cx="8229600" cy="548640"/>
+          </a:xfrm>
+          <a:prstGeom prst="rect">
+            <a:avLst/>
+          </a:prstGeom>
+          <a:noFill/>
+          <a:ln/>
+        </p:spPr>
+        <p:txBody>
+          <a:bodyPr wrap="square" lIns="0" tIns="0" rIns="0" bIns="0" rtlCol="0" anchor="t"/>
+          <a:lstStyle/>
+          <a:p>
+            <a:pPr algn="l" indent="0" marL="0">
+              <a:buNone/>
+            </a:pPr>
+            <a:r>
+              <a:rPr lang="en-US" sz="2800" b="1" dirty="0">
+                <a:solidFill>
+                  <a:schemeClr val="tx2"/>
+                </a:solidFill>
+              </a:rPr>
               <a:t>用并购理论看 McCormick 交易</a:t>
             </a:r>
             <a:endParaRPr lang="en-US" sz="2800" dirty="0"/>
@@ -3002,9 +4312,337 @@
                   <a:schemeClr val="accent4"/>
                 </a:solidFill>
               </a:rPr>
-              <a:t>来源：Advisor Perspectives (2026)；NJBIZ (2026)；CNN (2026)。交易 2026 年 3 月 31 日宣布，尚待监管批准。</a:t>
+              <a:t>来源：Barber (2026); Valinsky (2026); Redmond (2026)。交易 2026 年 3 月 31 日宣布，尚待监管批准。</a:t>
             </a:r>
             <a:endParaRPr lang="en-US" sz="850" dirty="0"/>
+          </a:p>
+        </p:txBody>
+      </p:sp>
+    </p:spTree>
+  </p:cSld>
+  <p:clrMapOvr>
+    <a:masterClrMapping/>
+  </p:clrMapOvr>
+</p:sld>
+</file>
+
+<file path=ppt/slides/slide4.xml><?xml version="1.0" encoding="utf-8"?>
+<p:sld xmlns:a="http://schemas.openxmlformats.org/drawingml/2006/main" xmlns:r="http://schemas.openxmlformats.org/officeDocument/2006/relationships" xmlns:p="http://schemas.openxmlformats.org/presentationml/2006/main">
+  <p:cSld name="Slide 4">
+    <p:spTree>
+      <p:nvGrpSpPr>
+        <p:cNvPr id="1" name=""/>
+        <p:cNvGrpSpPr/>
+        <p:nvPr/>
+      </p:nvGrpSpPr>
+      <p:grpSpPr>
+        <a:xfrm>
+          <a:off x="0" y="0"/>
+          <a:ext cx="0" cy="0"/>
+          <a:chOff x="0" y="0"/>
+          <a:chExt cx="0" cy="0"/>
+        </a:xfrm>
+      </p:grpSpPr>
+      <p:sp>
+        <p:nvSpPr>
+          <p:cNvPr id="2" name="Text 0"/>
+          <p:cNvSpPr/>
+          <p:nvPr>
+            <p:ph idx="100" type="title" hasCustomPrompt="1"/>
+          </p:nvPr>
+        </p:nvSpPr>
+        <p:spPr>
+          <a:xfrm>
+            <a:off x="457200" y="274320"/>
+            <a:ext cx="8229600" cy="548640"/>
+          </a:xfrm>
+          <a:prstGeom prst="rect">
+            <a:avLst/>
+          </a:prstGeom>
+          <a:noFill/>
+          <a:ln/>
+        </p:spPr>
+        <p:txBody>
+          <a:bodyPr wrap="square" lIns="0" tIns="0" rIns="0" bIns="0" rtlCol="0" anchor="t"/>
+          <a:lstStyle/>
+          <a:p>
+            <a:pPr algn="l" indent="0" marL="0">
+              <a:buNone/>
+            </a:pPr>
+            <a:r>
+              <a:rPr lang="en-US" sz="2800" b="1" dirty="0">
+                <a:solidFill>
+                  <a:schemeClr val="tx2"/>
+                </a:solidFill>
+              </a:rPr>
+              <a:t>参考文献（Harvard）</a:t>
+            </a:r>
+            <a:endParaRPr lang="en-US" sz="2800" dirty="0"/>
+          </a:p>
+        </p:txBody>
+      </p:sp>
+      <p:sp>
+        <p:nvSpPr>
+          <p:cNvPr id="3" name="Text 1"/>
+          <p:cNvSpPr txBox="1"/>
+          <p:nvPr/>
+        </p:nvSpPr>
+        <p:spPr>
+          <a:xfrm>
+            <a:off x="457200" y="914400"/>
+            <a:ext cx="4023360" cy="3977640"/>
+          </a:xfrm>
+          <a:prstGeom prst="rect">
+            <a:avLst/>
+          </a:prstGeom>
+          <a:noFill/>
+          <a:ln/>
+        </p:spPr>
+        <p:txBody>
+          <a:bodyPr wrap="square" lIns="0" tIns="0" rIns="0" bIns="0" rtlCol="0" anchor="t"/>
+          <a:lstStyle/>
+          <a:p>
+            <a:pPr indent="0" marL="0">
+              <a:spcAft>
+                <a:spcPts val="500"/>
+              </a:spcAft>
+              <a:buNone/>
+            </a:pPr>
+            <a:r>
+              <a:rPr lang="en-US" sz="800" dirty="0">
+                <a:solidFill>
+                  <a:schemeClr val="tx1"/>
+                </a:solidFill>
+              </a:rPr>
+              <a:t>Associated Press (2017) 'Kraft Heinz withdraws $143 billion bid to buy Unilever', NBC News, 19 February. Available at: https://www.nbcnews.com/news/us-news/kraft-heinz-withdraws-143-billion-bid-buy-unilever-n723041 (Accessed: 21 October 2026).</a:t>
+            </a:r>
+            <a:endParaRPr lang="en-US" sz="800" dirty="0"/>
+          </a:p>
+          <a:p>
+            <a:pPr indent="0" marL="0">
+              <a:spcAft>
+                <a:spcPts val="500"/>
+              </a:spcAft>
+              <a:buNone/>
+            </a:pPr>
+            <a:r>
+              <a:rPr lang="en-US" sz="800" dirty="0">
+                <a:solidFill>
+                  <a:schemeClr val="tx1"/>
+                </a:solidFill>
+              </a:rPr>
+              <a:t>Barber, L. (2026) 'Unilever confirms food spin-off sale talks as beauty portfolio takes centre stage', Cosmetics Business, 20 March. Available at: https://cosmeticsbusiness.com/unilever-confirms-food-sale-talks-beauty-focus (Accessed: 21 October 2026).</a:t>
+            </a:r>
+            <a:endParaRPr lang="en-US" sz="800" dirty="0"/>
+          </a:p>
+          <a:p>
+            <a:pPr indent="0" marL="0">
+              <a:spcAft>
+                <a:spcPts val="500"/>
+              </a:spcAft>
+              <a:buNone/>
+            </a:pPr>
+            <a:r>
+              <a:rPr lang="en-US" sz="800" dirty="0">
+                <a:solidFill>
+                  <a:schemeClr val="tx1"/>
+                </a:solidFill>
+              </a:rPr>
+              <a:t>Christensen, C.M., Alton, R., Rising, C. and Waldeck, A. (2011) 'The new M&amp;A playbook', Harvard Business Review, 89(3), pp. 48–57.</a:t>
+            </a:r>
+            <a:endParaRPr lang="en-US" sz="800" dirty="0"/>
+          </a:p>
+          <a:p>
+            <a:pPr indent="0" marL="0">
+              <a:spcAft>
+                <a:spcPts val="500"/>
+              </a:spcAft>
+              <a:buNone/>
+            </a:pPr>
+            <a:r>
+              <a:rPr lang="en-US" sz="800" dirty="0">
+                <a:solidFill>
+                  <a:schemeClr val="tx1"/>
+                </a:solidFill>
+              </a:rPr>
+              <a:t>CNNfn (2000) 'Unilever wins Bestfoods', CNNMoney, 6 June. Available at: https://money.cnn.com/2000/06/06/deals/bestfoods/ (Accessed: 21 October 2026).</a:t>
+            </a:r>
+            <a:endParaRPr lang="en-US" sz="800" dirty="0"/>
+          </a:p>
+          <a:p>
+            <a:pPr indent="0" marL="0">
+              <a:spcAft>
+                <a:spcPts val="500"/>
+              </a:spcAft>
+              <a:buNone/>
+            </a:pPr>
+            <a:r>
+              <a:rPr lang="en-US" sz="800" dirty="0">
+                <a:solidFill>
+                  <a:schemeClr val="tx1"/>
+                </a:solidFill>
+              </a:rPr>
+              <a:t>Encyclopedia.com (n.d.) 'Unilever', International Directory of Company Histories. Available at: https://www.encyclopedia.com/books/politics-and-business-magazines/unilever (Accessed: 21 October 2026).</a:t>
+            </a:r>
+            <a:endParaRPr lang="en-US" sz="800" dirty="0"/>
+          </a:p>
+          <a:p>
+            <a:pPr indent="0" marL="0">
+              <a:spcAft>
+                <a:spcPts val="500"/>
+              </a:spcAft>
+              <a:buNone/>
+            </a:pPr>
+            <a:r>
+              <a:rPr lang="en-US" sz="800" dirty="0">
+                <a:solidFill>
+                  <a:schemeClr val="tx1"/>
+                </a:solidFill>
+              </a:rPr>
+              <a:t>James, D. (2023) 'Unilever to sell Dollar Shave Club', Retail Dive, 26 October. Available at: https://www.retaildive.com/news/unilever-sells-razor-subscription-brand-dollar-shave-club/697913 (Accessed: 21 October 2026).</a:t>
+            </a:r>
+            <a:endParaRPr lang="en-US" sz="800" dirty="0"/>
+          </a:p>
+          <a:p>
+            <a:pPr indent="0" marL="0">
+              <a:spcAft>
+                <a:spcPts val="500"/>
+              </a:spcAft>
+              <a:buNone/>
+            </a:pPr>
+            <a:r>
+              <a:rPr lang="en-US" sz="800" dirty="0">
+                <a:solidFill>
+                  <a:schemeClr val="tx1"/>
+                </a:solidFill>
+              </a:rPr>
+              <a:t>Primack, D. (2016) 'Unilever buys Dollar Shave Club for $1 billion', Fortune, 19 July. Available at: https://fortune.com/2016/07/19/unilever-buys-dollar-shave-club-for-1-billion (Accessed: 21 October 2026).</a:t>
+            </a:r>
+            <a:endParaRPr lang="en-US" sz="800" dirty="0"/>
+          </a:p>
+        </p:txBody>
+      </p:sp>
+      <p:sp>
+        <p:nvSpPr>
+          <p:cNvPr id="4" name="Text 2"/>
+          <p:cNvSpPr txBox="1"/>
+          <p:nvPr/>
+        </p:nvSpPr>
+        <p:spPr>
+          <a:xfrm>
+            <a:off x="4663440" y="914400"/>
+            <a:ext cx="4023360" cy="3977640"/>
+          </a:xfrm>
+          <a:prstGeom prst="rect">
+            <a:avLst/>
+          </a:prstGeom>
+          <a:noFill/>
+          <a:ln/>
+        </p:spPr>
+        <p:txBody>
+          <a:bodyPr wrap="square" lIns="0" tIns="0" rIns="0" bIns="0" rtlCol="0" anchor="t"/>
+          <a:lstStyle/>
+          <a:p>
+            <a:pPr indent="0" marL="0">
+              <a:spcAft>
+                <a:spcPts val="500"/>
+              </a:spcAft>
+              <a:buNone/>
+            </a:pPr>
+            <a:r>
+              <a:rPr lang="en-US" sz="800" dirty="0">
+                <a:solidFill>
+                  <a:schemeClr val="tx1"/>
+                </a:solidFill>
+              </a:rPr>
+              <a:t>Redmond, K. (2026) 'McCormick to acquire Unilever's food business in $44.8B deal', NJBIZ, 1 April. Available at: https://njbiz.com/mccormick-unilever-food-business-44-8b-deal/ (Accessed: 21 October 2026).</a:t>
+            </a:r>
+            <a:endParaRPr lang="en-US" sz="800" dirty="0"/>
+          </a:p>
+          <a:p>
+            <a:pPr indent="0" marL="0">
+              <a:spcAft>
+                <a:spcPts val="500"/>
+              </a:spcAft>
+              <a:buNone/>
+            </a:pPr>
+            <a:r>
+              <a:rPr lang="en-US" sz="800" dirty="0">
+                <a:solidFill>
+                  <a:schemeClr val="tx1"/>
+                </a:solidFill>
+              </a:rPr>
+              <a:t>Reuters (2025) 'Magnum Ice Cream valued at $9.1 billion in Amsterdam listing', MarketScreener, 8 December. Available at: https://www.marketscreener.com/news/unilever-completes-ice-cream-demerger-with-magnum-set-to-list-ce7d51dddc8df620 (Accessed: 21 October 2026).</a:t>
+            </a:r>
+            <a:endParaRPr lang="en-US" sz="800" dirty="0"/>
+          </a:p>
+          <a:p>
+            <a:pPr indent="0" marL="0">
+              <a:spcAft>
+                <a:spcPts val="500"/>
+              </a:spcAft>
+              <a:buNone/>
+            </a:pPr>
+            <a:r>
+              <a:rPr lang="en-US" sz="800" dirty="0">
+                <a:solidFill>
+                  <a:schemeClr val="tx1"/>
+                </a:solidFill>
+              </a:rPr>
+              <a:t>University of Greenwich (2026) 'Lecture 3: Diversification – M&amp;A and/or FDI?' [Lecture slides]. BUSI 1763 Dynamics of Global Business. Available at: Moodle (Accessed: 21 October 2026).</a:t>
+            </a:r>
+            <a:endParaRPr lang="en-US" sz="800" dirty="0"/>
+          </a:p>
+          <a:p>
+            <a:pPr indent="0" marL="0">
+              <a:spcAft>
+                <a:spcPts val="500"/>
+              </a:spcAft>
+              <a:buNone/>
+            </a:pPr>
+            <a:r>
+              <a:rPr lang="en-US" sz="800" dirty="0">
+                <a:solidFill>
+                  <a:schemeClr val="tx1"/>
+                </a:solidFill>
+              </a:rPr>
+              <a:t>UPI (2000) 'Unilever buys Ben &amp; Jerry's', United Press International, 12 April. Available at: https://www.upi.com/Archives/2000/04/12/Unilever-buys-Ben-Jerrys/2054955512000/ (Accessed: 21 October 2026).</a:t>
+            </a:r>
+            <a:endParaRPr lang="en-US" sz="800" dirty="0"/>
+          </a:p>
+          <a:p>
+            <a:pPr indent="0" marL="0">
+              <a:spcAft>
+                <a:spcPts val="500"/>
+              </a:spcAft>
+              <a:buNone/>
+            </a:pPr>
+            <a:r>
+              <a:rPr lang="en-US" sz="800" dirty="0">
+                <a:solidFill>
+                  <a:schemeClr val="tx1"/>
+                </a:solidFill>
+              </a:rPr>
+              <a:t>Valinsky, J. (2026) 'McCormick is merging with Unilever's food business', CNN, 31 March. Available at: https://kvia.com/news/business-technology/cnn-business-consumer/2026/03/31/mccormick-is-merging-with-unilevers-food-business/ (Accessed: 21 October 2026).</a:t>
+            </a:r>
+            <a:endParaRPr lang="en-US" sz="800" dirty="0"/>
+          </a:p>
+          <a:p>
+            <a:pPr indent="0" marL="0">
+              <a:spcAft>
+                <a:spcPts val="500"/>
+              </a:spcAft>
+              <a:buNone/>
+            </a:pPr>
+            <a:r>
+              <a:rPr lang="en-US" sz="800" dirty="0">
+                <a:solidFill>
+                  <a:schemeClr val="tx1"/>
+                </a:solidFill>
+              </a:rPr>
+              <a:t>Williams, D. (2022) 'Unilever under pressure after GSK consumer bid flop', CHEManager, 25 January. Available at: https://www.chemanager-online.com/en/news/unilever-under-pressure-after-gsk-consumer-bid-flop (Accessed: 21 October 2026).</a:t>
+            </a:r>
+            <a:endParaRPr lang="en-US" sz="800" dirty="0"/>
           </a:p>
         </p:txBody>
       </p:sp>

--- a/content/busi1763/files/Unilever_MA_CN.pptx
+++ b/content/busi1763/files/Unilever_MA_CN.pptx
@@ -110,7 +110,7 @@
   <p:extLst>
     <p:ext uri="{521415D9-36F7-43E2-AB2F-B90AF26B5E84}">
       <p14:sectionLst xmlns:p14="http://schemas.microsoft.com/office/powerpoint/2010/main">
-        <p14:section name="M&amp;A" id="{97fbdfca-ad98-7b43-dfec-2b91e69d2cc3}">
+        <p14:section name="M&amp;A" id="{7493b6ac-ebaa-3905-e9cd-19b9aa152567}">
           <p14:sldIdLst>
             <p14:sldId id="256"/>
             <p14:sldId id="257"/>
@@ -2386,7 +2386,7 @@
                   <a:schemeClr val="tx2"/>
                 </a:solidFill>
               </a:rPr>
-              <a:t>Unilever 的并购：从“买”到“卖”</a:t>
+              <a:t>Unilever 2020–2026 的并购：买美妆、卖食品</a:t>
             </a:r>
             <a:endParaRPr lang="en-US" sz="2800" dirty="0"/>
           </a:p>
@@ -2422,7 +2422,7 @@
                   <a:schemeClr val="tx1"/>
                 </a:solidFill>
               </a:rPr>
-              <a:t>前二十年靠收购做大，近几年转向聚焦核心</a:t>
+              <a:t>业务更少、增长更快</a:t>
             </a:r>
             <a:endParaRPr lang="en-US" sz="1300" dirty="0"/>
           </a:p>
@@ -2480,7 +2480,7 @@
                   <a:schemeClr val="tx1"/>
                 </a:solidFill>
               </a:rPr>
-              <a:t>1929 · 本身就是一次合并：英国 Lever Brothers + 荷兰 Margarine Unie</a:t>
+              <a:t>分析范围：2020–2026 · 之前的收购：Bestfoods、Ben &amp; Jerry's（2000）、DSC（2016）</a:t>
             </a:r>
             <a:endParaRPr lang="en-US" sz="1200" dirty="0"/>
           </a:p>
@@ -2552,7 +2552,7 @@
                   <a:srgbClr val="FFFFFF"/>
                 </a:solidFill>
               </a:rPr>
-              <a:t>做大规模、进入新市场</a:t>
+              <a:t>美妆和个人护理</a:t>
             </a:r>
             <a:endParaRPr lang="en-US" sz="1500" dirty="0"/>
           </a:p>
@@ -2608,7 +2608,7 @@
                   <a:srgbClr val="FFFFFF"/>
                 </a:solidFill>
               </a:rPr>
-              <a:t>2000</a:t>
+              <a:t>2021</a:t>
             </a:r>
             <a:endParaRPr lang="en-US" sz="1000" dirty="0"/>
           </a:p>
@@ -2644,7 +2644,7 @@
                   <a:schemeClr val="tx1"/>
                 </a:solidFill>
               </a:rPr>
-              <a:t>Bestfoods</a:t>
+              <a:t>Paula's Choice</a:t>
             </a:r>
             <a:endParaRPr lang="en-US" sz="1250" dirty="0"/>
           </a:p>
@@ -2658,7 +2658,7 @@
                   <a:schemeClr val="accent4"/>
                 </a:solidFill>
               </a:rPr>
-              <a:t>243 亿美元 · Knorr、Hellmann's</a:t>
+              <a:t>18 亿欧元 · 网上起家的护肤品牌</a:t>
             </a:r>
             <a:endParaRPr lang="en-US" sz="1250" dirty="0"/>
           </a:p>
@@ -2714,7 +2714,7 @@
                   <a:srgbClr val="FFFFFF"/>
                 </a:solidFill>
               </a:rPr>
-              <a:t>2000</a:t>
+              <a:t>2025</a:t>
             </a:r>
             <a:endParaRPr lang="en-US" sz="1000" dirty="0"/>
           </a:p>
@@ -2750,7 +2750,7 @@
                   <a:schemeClr val="tx1"/>
                 </a:solidFill>
               </a:rPr>
-              <a:t>Ben &amp; Jerry's</a:t>
+              <a:t>Dr. Squatch</a:t>
             </a:r>
             <a:endParaRPr lang="en-US" sz="1250" dirty="0"/>
           </a:p>
@@ -2764,7 +2764,7 @@
                   <a:schemeClr val="accent4"/>
                 </a:solidFill>
               </a:rPr>
-              <a:t>3.26 亿美元 · 独立运营，保留董事会</a:t>
+              <a:t>约 15 亿美元（媒体报道）· 男士个护</a:t>
             </a:r>
             <a:endParaRPr lang="en-US" sz="1250" dirty="0"/>
           </a:p>
@@ -2772,113 +2772,7 @@
       </p:sp>
       <p:sp>
         <p:nvSpPr>
-          <p:cNvPr id="14" name="yr02"/>
-          <p:cNvSpPr/>
-          <p:nvPr/>
-        </p:nvSpPr>
-        <p:spPr>
-          <a:xfrm>
-            <a:off x="457200" y="3840480"/>
-            <a:ext cx="475488" cy="475488"/>
-          </a:xfrm>
-          <a:prstGeom prst="ellipse">
-            <a:avLst/>
-          </a:prstGeom>
-          <a:solidFill>
-            <a:schemeClr val="accent1"/>
-          </a:solidFill>
-          <a:ln/>
-        </p:spPr>
-      </p:sp>
-      <p:sp>
-        <p:nvSpPr>
-          <p:cNvPr id="15" name="Text 13"/>
-          <p:cNvSpPr txBox="1"/>
-          <p:nvPr/>
-        </p:nvSpPr>
-        <p:spPr>
-          <a:xfrm>
-            <a:off x="457200" y="3840480"/>
-            <a:ext cx="475488" cy="475488"/>
-          </a:xfrm>
-          <a:prstGeom prst="rect">
-            <a:avLst/>
-          </a:prstGeom>
-          <a:noFill/>
-          <a:ln/>
-        </p:spPr>
-        <p:txBody>
-          <a:bodyPr wrap="square" lIns="0" tIns="0" rIns="0" bIns="0" rtlCol="0" anchor="ctr"/>
-          <a:lstStyle/>
-          <a:p>
-            <a:pPr algn="ctr" indent="0" marL="0">
-              <a:buNone/>
-            </a:pPr>
-            <a:r>
-              <a:rPr lang="en-US" sz="1000" b="1" dirty="0">
-                <a:solidFill>
-                  <a:srgbClr val="FFFFFF"/>
-                </a:solidFill>
-              </a:rPr>
-              <a:t>2016</a:t>
-            </a:r>
-            <a:endParaRPr lang="en-US" sz="1000" dirty="0"/>
-          </a:p>
-        </p:txBody>
-      </p:sp>
-      <p:sp>
-        <p:nvSpPr>
-          <p:cNvPr id="16" name="Text 14"/>
-          <p:cNvSpPr txBox="1"/>
-          <p:nvPr/>
-        </p:nvSpPr>
-        <p:spPr>
-          <a:xfrm>
-            <a:off x="1005840" y="3803904"/>
-            <a:ext cx="2057400" cy="603504"/>
-          </a:xfrm>
-          <a:prstGeom prst="rect">
-            <a:avLst/>
-          </a:prstGeom>
-          <a:noFill/>
-          <a:ln/>
-        </p:spPr>
-        <p:txBody>
-          <a:bodyPr wrap="square" lIns="0" tIns="0" rIns="0" bIns="0" rtlCol="0" anchor="t"/>
-          <a:lstStyle/>
-          <a:p>
-            <a:pPr indent="0" marL="0">
-              <a:buNone/>
-            </a:pPr>
-            <a:r>
-              <a:rPr lang="en-US" sz="1250" b="1" dirty="0">
-                <a:solidFill>
-                  <a:schemeClr val="tx1"/>
-                </a:solidFill>
-              </a:rPr>
-              <a:t>Dollar Shave Club</a:t>
-            </a:r>
-            <a:endParaRPr lang="en-US" sz="1250" dirty="0"/>
-          </a:p>
-          <a:p>
-            <a:pPr indent="0" marL="0">
-              <a:buNone/>
-            </a:pPr>
-            <a:r>
-              <a:rPr lang="en-US" sz="1050" dirty="0">
-                <a:solidFill>
-                  <a:schemeClr val="accent4"/>
-                </a:solidFill>
-              </a:rPr>
-              <a:t>约 10 亿美元 · 网上直销</a:t>
-            </a:r>
-            <a:endParaRPr lang="en-US" sz="1250" dirty="0"/>
-          </a:p>
-        </p:txBody>
-      </p:sp>
-      <p:sp>
-        <p:nvSpPr>
-          <p:cNvPr id="17" name="phase1"/>
+          <p:cNvPr id="14" name="phase1"/>
           <p:cNvSpPr/>
           <p:nvPr/>
         </p:nvSpPr>
@@ -2900,7 +2794,7 @@
       </p:sp>
       <p:sp>
         <p:nvSpPr>
-          <p:cNvPr id="18" name="Text 16"/>
+          <p:cNvPr id="15" name="Text 13"/>
           <p:cNvSpPr txBox="1"/>
           <p:nvPr/>
         </p:nvSpPr>
@@ -2928,7 +2822,7 @@
                   <a:srgbClr val="FFFFFF"/>
                 </a:solidFill>
               </a:rPr>
-              <a:t>转折</a:t>
+              <a:t>收购失败</a:t>
             </a:r>
             <a:endParaRPr lang="en-US" sz="1500" dirty="0"/>
           </a:p>
@@ -2942,7 +2836,7 @@
                   <a:srgbClr val="FFFFFF"/>
                 </a:solidFill>
               </a:rPr>
-              <a:t>来自收购方和投资者的压力</a:t>
+              <a:t>投资者反对</a:t>
             </a:r>
             <a:endParaRPr lang="en-US" sz="1500" dirty="0"/>
           </a:p>
@@ -2950,7 +2844,7 @@
       </p:sp>
       <p:sp>
         <p:nvSpPr>
-          <p:cNvPr id="19" name="yr10"/>
+          <p:cNvPr id="16" name="yr10"/>
           <p:cNvSpPr/>
           <p:nvPr/>
         </p:nvSpPr>
@@ -2970,7 +2864,7 @@
       </p:sp>
       <p:sp>
         <p:nvSpPr>
-          <p:cNvPr id="20" name="Text 18"/>
+          <p:cNvPr id="17" name="Text 15"/>
           <p:cNvSpPr txBox="1"/>
           <p:nvPr/>
         </p:nvSpPr>
@@ -2998,7 +2892,7 @@
                   <a:srgbClr val="FFFFFF"/>
                 </a:solidFill>
               </a:rPr>
-              <a:t>2017</a:t>
+              <a:t>2022</a:t>
             </a:r>
             <a:endParaRPr lang="en-US" sz="1000" dirty="0"/>
           </a:p>
@@ -3006,7 +2900,7 @@
       </p:sp>
       <p:sp>
         <p:nvSpPr>
-          <p:cNvPr id="21" name="Text 19"/>
+          <p:cNvPr id="18" name="Text 16"/>
           <p:cNvSpPr txBox="1"/>
           <p:nvPr/>
         </p:nvSpPr>
@@ -3034,7 +2928,7 @@
                   <a:schemeClr val="tx1"/>
                 </a:solidFill>
               </a:rPr>
-              <a:t>Kraft Heinz 收购</a:t>
+              <a:t>GSK 消费者健康</a:t>
             </a:r>
             <a:endParaRPr lang="en-US" sz="1250" dirty="0"/>
           </a:p>
@@ -3048,7 +2942,7 @@
                   <a:schemeClr val="accent4"/>
                 </a:solidFill>
               </a:rPr>
-              <a:t>1,430 亿美元报价被拒，随后撤回</a:t>
+              <a:t>500 亿英镑出价，股东反对后放弃</a:t>
             </a:r>
             <a:endParaRPr lang="en-US" sz="1250" dirty="0"/>
           </a:p>
@@ -3056,113 +2950,7 @@
       </p:sp>
       <p:sp>
         <p:nvSpPr>
-          <p:cNvPr id="22" name="yr11"/>
-          <p:cNvSpPr/>
-          <p:nvPr/>
-        </p:nvSpPr>
-        <p:spPr>
-          <a:xfrm>
-            <a:off x="3268980" y="3127248"/>
-            <a:ext cx="475488" cy="475488"/>
-          </a:xfrm>
-          <a:prstGeom prst="ellipse">
-            <a:avLst/>
-          </a:prstGeom>
-          <a:solidFill>
-            <a:schemeClr val="accent3"/>
-          </a:solidFill>
-          <a:ln/>
-        </p:spPr>
-      </p:sp>
-      <p:sp>
-        <p:nvSpPr>
-          <p:cNvPr id="23" name="Text 21"/>
-          <p:cNvSpPr txBox="1"/>
-          <p:nvPr/>
-        </p:nvSpPr>
-        <p:spPr>
-          <a:xfrm>
-            <a:off x="3268980" y="3127248"/>
-            <a:ext cx="475488" cy="475488"/>
-          </a:xfrm>
-          <a:prstGeom prst="rect">
-            <a:avLst/>
-          </a:prstGeom>
-          <a:noFill/>
-          <a:ln/>
-        </p:spPr>
-        <p:txBody>
-          <a:bodyPr wrap="square" lIns="0" tIns="0" rIns="0" bIns="0" rtlCol="0" anchor="ctr"/>
-          <a:lstStyle/>
-          <a:p>
-            <a:pPr algn="ctr" indent="0" marL="0">
-              <a:buNone/>
-            </a:pPr>
-            <a:r>
-              <a:rPr lang="en-US" sz="1000" b="1" dirty="0">
-                <a:solidFill>
-                  <a:srgbClr val="FFFFFF"/>
-                </a:solidFill>
-              </a:rPr>
-              <a:t>2022</a:t>
-            </a:r>
-            <a:endParaRPr lang="en-US" sz="1000" dirty="0"/>
-          </a:p>
-        </p:txBody>
-      </p:sp>
-      <p:sp>
-        <p:nvSpPr>
-          <p:cNvPr id="24" name="Text 22"/>
-          <p:cNvSpPr txBox="1"/>
-          <p:nvPr/>
-        </p:nvSpPr>
-        <p:spPr>
-          <a:xfrm>
-            <a:off x="3817620" y="3090672"/>
-            <a:ext cx="2057400" cy="603504"/>
-          </a:xfrm>
-          <a:prstGeom prst="rect">
-            <a:avLst/>
-          </a:prstGeom>
-          <a:noFill/>
-          <a:ln/>
-        </p:spPr>
-        <p:txBody>
-          <a:bodyPr wrap="square" lIns="0" tIns="0" rIns="0" bIns="0" rtlCol="0" anchor="t"/>
-          <a:lstStyle/>
-          <a:p>
-            <a:pPr indent="0" marL="0">
-              <a:buNone/>
-            </a:pPr>
-            <a:r>
-              <a:rPr lang="en-US" sz="1250" b="1" dirty="0">
-                <a:solidFill>
-                  <a:schemeClr val="tx1"/>
-                </a:solidFill>
-              </a:rPr>
-              <a:t>GSK 消费者健康</a:t>
-            </a:r>
-            <a:endParaRPr lang="en-US" sz="1250" dirty="0"/>
-          </a:p>
-          <a:p>
-            <a:pPr indent="0" marL="0">
-              <a:buNone/>
-            </a:pPr>
-            <a:r>
-              <a:rPr lang="en-US" sz="1050" dirty="0">
-                <a:solidFill>
-                  <a:schemeClr val="accent4"/>
-                </a:solidFill>
-              </a:rPr>
-              <a:t>500 亿英镑出价，股东反对后放弃</a:t>
-            </a:r>
-            <a:endParaRPr lang="en-US" sz="1250" dirty="0"/>
-          </a:p>
-        </p:txBody>
-      </p:sp>
-      <p:sp>
-        <p:nvSpPr>
-          <p:cNvPr id="25" name="phase2"/>
+          <p:cNvPr id="19" name="phase2"/>
           <p:cNvSpPr/>
           <p:nvPr/>
         </p:nvSpPr>
@@ -3184,7 +2972,7 @@
       </p:sp>
       <p:sp>
         <p:nvSpPr>
-          <p:cNvPr id="26" name="Text 24"/>
+          <p:cNvPr id="20" name="Text 18"/>
           <p:cNvSpPr txBox="1"/>
           <p:nvPr/>
         </p:nvSpPr>
@@ -3234,7 +3022,7 @@
       </p:sp>
       <p:sp>
         <p:nvSpPr>
-          <p:cNvPr id="27" name="yr20"/>
+          <p:cNvPr id="21" name="yr20"/>
           <p:cNvSpPr/>
           <p:nvPr/>
         </p:nvSpPr>
@@ -3254,7 +3042,7 @@
       </p:sp>
       <p:sp>
         <p:nvSpPr>
-          <p:cNvPr id="28" name="Text 26"/>
+          <p:cNvPr id="22" name="Text 20"/>
           <p:cNvSpPr txBox="1"/>
           <p:nvPr/>
         </p:nvSpPr>
@@ -3290,7 +3078,7 @@
       </p:sp>
       <p:sp>
         <p:nvSpPr>
-          <p:cNvPr id="29" name="Text 27"/>
+          <p:cNvPr id="23" name="Text 21"/>
           <p:cNvSpPr txBox="1"/>
           <p:nvPr/>
         </p:nvSpPr>
@@ -3340,7 +3128,7 @@
       </p:sp>
       <p:sp>
         <p:nvSpPr>
-          <p:cNvPr id="30" name="yr21"/>
+          <p:cNvPr id="24" name="yr21"/>
           <p:cNvSpPr/>
           <p:nvPr/>
         </p:nvSpPr>
@@ -3360,7 +3148,7 @@
       </p:sp>
       <p:sp>
         <p:nvSpPr>
-          <p:cNvPr id="31" name="Text 29"/>
+          <p:cNvPr id="25" name="Text 23"/>
           <p:cNvSpPr txBox="1"/>
           <p:nvPr/>
         </p:nvSpPr>
@@ -3396,7 +3184,7 @@
       </p:sp>
       <p:sp>
         <p:nvSpPr>
-          <p:cNvPr id="32" name="Text 30"/>
+          <p:cNvPr id="26" name="Text 24"/>
           <p:cNvSpPr txBox="1"/>
           <p:nvPr/>
         </p:nvSpPr>
@@ -3446,7 +3234,7 @@
       </p:sp>
       <p:sp>
         <p:nvSpPr>
-          <p:cNvPr id="33" name="yr22"/>
+          <p:cNvPr id="27" name="yr22"/>
           <p:cNvSpPr/>
           <p:nvPr/>
         </p:nvSpPr>
@@ -3466,7 +3254,7 @@
       </p:sp>
       <p:sp>
         <p:nvSpPr>
-          <p:cNvPr id="34" name="Text 32"/>
+          <p:cNvPr id="28" name="Text 26"/>
           <p:cNvSpPr txBox="1"/>
           <p:nvPr/>
         </p:nvSpPr>
@@ -3502,7 +3290,7 @@
       </p:sp>
       <p:sp>
         <p:nvSpPr>
-          <p:cNvPr id="35" name="Text 33"/>
+          <p:cNvPr id="29" name="Text 27"/>
           <p:cNvSpPr txBox="1"/>
           <p:nvPr/>
         </p:nvSpPr>
@@ -3552,7 +3340,7 @@
       </p:sp>
       <p:sp>
         <p:nvSpPr>
-          <p:cNvPr id="36" name="Text 34"/>
+          <p:cNvPr id="30" name="Text 28"/>
           <p:cNvSpPr txBox="1"/>
           <p:nvPr/>
         </p:nvSpPr>
@@ -3580,7 +3368,7 @@
                   <a:schemeClr val="accent4"/>
                 </a:solidFill>
               </a:rPr>
-              <a:t>来源：Encyclopedia.com (n.d.); CNNfn (2000); UPI (2000); Primack (2016); Associated Press (2017); Williams (2022); James (2023); Reuters (2025); Redmond (2026)</a:t>
+              <a:t>来源：CNNfn (2000); UPI (2000); Primack (2016); Unilever PLC (2022); Williams (2022); James (2023); Jobe (2025); Reuters (2025); Redmond (2026).</a:t>
             </a:r>
             <a:endParaRPr lang="en-US" sz="800" dirty="0"/>
           </a:p>
@@ -4276,7 +4064,7 @@
                   <a:srgbClr val="FFFFFF"/>
                 </a:solidFill>
               </a:rPr>
-              <a:t>总体成功：并购让 Unilever 成为全球巨头；但没有协同效应的收购（如 Dollar Shave Club）失败了。</a:t>
+              <a:t>总体成功：并购帮 Unilever 做大，现在又帮它聚焦美妆和个护；但没有协同效应的收购（如 Dollar Shave Club）失败了。</a:t>
             </a:r>
             <a:endParaRPr lang="en-US" sz="1300" dirty="0"/>
           </a:p>
@@ -4414,7 +4202,7 @@
                   <a:schemeClr val="tx1"/>
                 </a:solidFill>
               </a:rPr>
-              <a:t>Associated Press (2017) 'Kraft Heinz withdraws $143 billion bid to buy Unilever', NBC News, 19 February. Available at: https://www.nbcnews.com/news/us-news/kraft-heinz-withdraws-143-billion-bid-buy-unilever-n723041 (Accessed: 21 October 2026).</a:t>
+              <a:t>Barber, L. (2026) 'Unilever confirms food spin-off sale talks as beauty portfolio takes centre stage', Cosmetics Business, 20 March. Available at: https://cosmeticsbusiness.com/unilever-confirms-food-sale-talks-beauty-focus (Accessed: 21 October 2026).</a:t>
             </a:r>
             <a:endParaRPr lang="en-US" sz="800" dirty="0"/>
           </a:p>
@@ -4431,7 +4219,7 @@
                   <a:schemeClr val="tx1"/>
                 </a:solidFill>
               </a:rPr>
-              <a:t>Barber, L. (2026) 'Unilever confirms food spin-off sale talks as beauty portfolio takes centre stage', Cosmetics Business, 20 March. Available at: https://cosmeticsbusiness.com/unilever-confirms-food-sale-talks-beauty-focus (Accessed: 21 October 2026).</a:t>
+              <a:t>Christensen, C.M., Alton, R., Rising, C. and Waldeck, A. (2011) 'The new M&amp;A playbook', Harvard Business Review, 89(3), pp. 48–57.</a:t>
             </a:r>
             <a:endParaRPr lang="en-US" sz="800" dirty="0"/>
           </a:p>
@@ -4448,7 +4236,7 @@
                   <a:schemeClr val="tx1"/>
                 </a:solidFill>
               </a:rPr>
-              <a:t>Christensen, C.M., Alton, R., Rising, C. and Waldeck, A. (2011) 'The new M&amp;A playbook', Harvard Business Review, 89(3), pp. 48–57.</a:t>
+              <a:t>CNNfn (2000) 'Unilever wins Bestfoods', CNNMoney, 6 June. Available at: https://money.cnn.com/2000/06/06/deals/bestfoods/ (Accessed: 21 October 2026).</a:t>
             </a:r>
             <a:endParaRPr lang="en-US" sz="800" dirty="0"/>
           </a:p>
@@ -4465,7 +4253,7 @@
                   <a:schemeClr val="tx1"/>
                 </a:solidFill>
               </a:rPr>
-              <a:t>CNNfn (2000) 'Unilever wins Bestfoods', CNNMoney, 6 June. Available at: https://money.cnn.com/2000/06/06/deals/bestfoods/ (Accessed: 21 October 2026).</a:t>
+              <a:t>James, D. (2023) 'Unilever to sell Dollar Shave Club', Retail Dive, 26 October. Available at: https://www.retaildive.com/news/unilever-sells-razor-subscription-brand-dollar-shave-club/697913 (Accessed: 21 October 2026).</a:t>
             </a:r>
             <a:endParaRPr lang="en-US" sz="800" dirty="0"/>
           </a:p>
@@ -4482,7 +4270,7 @@
                   <a:schemeClr val="tx1"/>
                 </a:solidFill>
               </a:rPr>
-              <a:t>Encyclopedia.com (n.d.) 'Unilever', International Directory of Company Histories. Available at: https://www.encyclopedia.com/books/politics-and-business-magazines/unilever (Accessed: 21 October 2026).</a:t>
+              <a:t>Jobe, N. (2025) 'Unilever to pay $1.5 billion for men's grooming brand Dr. Squatch', Cosmetics Business, 1 July. Available at: https://cosmeticsbusiness.com/unilever-to-pay-1-5-billion-for-men-s-grooming (Accessed: 21 October 2026).</a:t>
             </a:r>
             <a:endParaRPr lang="en-US" sz="800" dirty="0"/>
           </a:p>
@@ -4499,7 +4287,7 @@
                   <a:schemeClr val="tx1"/>
                 </a:solidFill>
               </a:rPr>
-              <a:t>James, D. (2023) 'Unilever to sell Dollar Shave Club', Retail Dive, 26 October. Available at: https://www.retaildive.com/news/unilever-sells-razor-subscription-brand-dollar-shave-club/697913 (Accessed: 21 October 2026).</a:t>
+              <a:t>Primack, D. (2016) 'Unilever buys Dollar Shave Club for $1 billion', Fortune, 19 July. Available at: https://fortune.com/2016/07/19/unilever-buys-dollar-shave-club-for-1-billion (Accessed: 21 October 2026).</a:t>
             </a:r>
             <a:endParaRPr lang="en-US" sz="800" dirty="0"/>
           </a:p>
@@ -4516,7 +4304,7 @@
                   <a:schemeClr val="tx1"/>
                 </a:solidFill>
               </a:rPr>
-              <a:t>Primack, D. (2016) 'Unilever buys Dollar Shave Club for $1 billion', Fortune, 19 July. Available at: https://fortune.com/2016/07/19/unilever-buys-dollar-shave-club-for-1-billion (Accessed: 21 October 2026).</a:t>
+              <a:t>Redmond, K. (2026) 'McCormick to acquire Unilever's food business in $44.8B deal', NJBIZ, 1 April. Available at: https://njbiz.com/mccormick-unilever-food-business-44-8b-deal/ (Accessed: 21 October 2026).</a:t>
             </a:r>
             <a:endParaRPr lang="en-US" sz="800" dirty="0"/>
           </a:p>
@@ -4555,7 +4343,7 @@
                   <a:schemeClr val="tx1"/>
                 </a:solidFill>
               </a:rPr>
-              <a:t>Redmond, K. (2026) 'McCormick to acquire Unilever's food business in $44.8B deal', NJBIZ, 1 April. Available at: https://njbiz.com/mccormick-unilever-food-business-44-8b-deal/ (Accessed: 21 October 2026).</a:t>
+              <a:t>Reuters (2025) 'Magnum Ice Cream valued at $9.1 billion in Amsterdam listing', MarketScreener, 8 December. Available at: https://www.marketscreener.com/news/unilever-completes-ice-cream-demerger-with-magnum-set-to-list-ce7d51dddc8df620 (Accessed: 21 October 2026).</a:t>
             </a:r>
             <a:endParaRPr lang="en-US" sz="800" dirty="0"/>
           </a:p>
@@ -4572,7 +4360,7 @@
                   <a:schemeClr val="tx1"/>
                 </a:solidFill>
               </a:rPr>
-              <a:t>Reuters (2025) 'Magnum Ice Cream valued at $9.1 billion in Amsterdam listing', MarketScreener, 8 December. Available at: https://www.marketscreener.com/news/unilever-completes-ice-cream-demerger-with-magnum-set-to-list-ce7d51dddc8df620 (Accessed: 21 October 2026).</a:t>
+              <a:t>Unilever PLC (2022) Annual Report on Form 20-F 2021. Available at: https://www.sec.gov/Archives/edgar/data/217410/000021741022000009/ul-20211231.htm (Accessed: 21 October 2026).</a:t>
             </a:r>
             <a:endParaRPr lang="en-US" sz="800" dirty="0"/>
           </a:p>

--- a/content/busi1763/files/Unilever_MA_CN.pptx
+++ b/content/busi1763/files/Unilever_MA_CN.pptx
@@ -110,7 +110,7 @@
   <p:extLst>
     <p:ext uri="{521415D9-36F7-43E2-AB2F-B90AF26B5E84}">
       <p14:sectionLst xmlns:p14="http://schemas.microsoft.com/office/powerpoint/2010/main">
-        <p14:section name="M&amp;A" id="{7493b6ac-ebaa-3905-e9cd-19b9aa152567}">
+        <p14:section name="M&amp;A" id="{d99d3312-7fc8-4a64-bb3c-42fbcdc05e92}">
           <p14:sldIdLst>
             <p14:sldId id="256"/>
             <p14:sldId id="257"/>
